--- a/public/lessons/year-6-maths/autumn/week-7/estimate-the-size-of-answers/teaching-powerpoint-v1.pptx
+++ b/public/lessons/year-6-maths/autumn/week-7/estimate-the-size-of-answers/teaching-powerpoint-v1.pptx
@@ -2,24 +2,24 @@
 <file path=ppt/presentation.xml><?xml version="1.0" encoding="utf-8"?>
 <p:presentation xmlns:p="http://schemas.openxmlformats.org/presentationml/2006/main">
   <p:sldMasterIdLst>
-    <p:sldMasterId xmlns:r="http://schemas.openxmlformats.org/officeDocument/2006/relationships" id="2147483648" r:id="R81802f1e62414aab"/>
+    <p:sldMasterId xmlns:r="http://schemas.openxmlformats.org/officeDocument/2006/relationships" id="2147483648" r:id="R2482f0404c15475e"/>
   </p:sldMasterIdLst>
   <p:notesMasterIdLst>
-    <p:notesMasterId xmlns:r="http://schemas.openxmlformats.org/officeDocument/2006/relationships" r:id="R84f757a5c4b04863"/>
+    <p:notesMasterId xmlns:r="http://schemas.openxmlformats.org/officeDocument/2006/relationships" r:id="R0754c79da07c4b92"/>
   </p:notesMasterIdLst>
   <p:sldIdLst>
-    <p:sldId xmlns:r="http://schemas.openxmlformats.org/officeDocument/2006/relationships" id="256" r:id="R0ec042ea96ba4eee"/>
-    <p:sldId xmlns:r="http://schemas.openxmlformats.org/officeDocument/2006/relationships" id="257" r:id="R7319d9eea4e74462"/>
-    <p:sldId xmlns:r="http://schemas.openxmlformats.org/officeDocument/2006/relationships" id="258" r:id="Ra6196e7aa03d499c"/>
-    <p:sldId xmlns:r="http://schemas.openxmlformats.org/officeDocument/2006/relationships" id="259" r:id="R9695b42e2d4644fc"/>
-    <p:sldId xmlns:r="http://schemas.openxmlformats.org/officeDocument/2006/relationships" id="260" r:id="Rc34431ba15724b1e"/>
-    <p:sldId xmlns:r="http://schemas.openxmlformats.org/officeDocument/2006/relationships" id="261" r:id="Rc33c5191b5674778"/>
-    <p:sldId xmlns:r="http://schemas.openxmlformats.org/officeDocument/2006/relationships" id="262" r:id="R8798cb610f3b4e40"/>
-    <p:sldId xmlns:r="http://schemas.openxmlformats.org/officeDocument/2006/relationships" id="263" r:id="R9b5c7c9ded2945c5"/>
-    <p:sldId xmlns:r="http://schemas.openxmlformats.org/officeDocument/2006/relationships" id="264" r:id="Rf7f8a05d1a1d44c5"/>
-    <p:sldId xmlns:r="http://schemas.openxmlformats.org/officeDocument/2006/relationships" id="265" r:id="R883d7f1b7fc14616"/>
-    <p:sldId xmlns:r="http://schemas.openxmlformats.org/officeDocument/2006/relationships" id="266" r:id="Re6d14f9e84c2415d"/>
-    <p:sldId xmlns:r="http://schemas.openxmlformats.org/officeDocument/2006/relationships" id="267" r:id="R092f96478b624d62"/>
+    <p:sldId xmlns:r="http://schemas.openxmlformats.org/officeDocument/2006/relationships" id="256" r:id="R6afd00b8b8094ba5"/>
+    <p:sldId xmlns:r="http://schemas.openxmlformats.org/officeDocument/2006/relationships" id="257" r:id="R2bcfc9a6820f4ba7"/>
+    <p:sldId xmlns:r="http://schemas.openxmlformats.org/officeDocument/2006/relationships" id="258" r:id="R07e09a4fa0df4f32"/>
+    <p:sldId xmlns:r="http://schemas.openxmlformats.org/officeDocument/2006/relationships" id="259" r:id="Reaeaa63985d6476e"/>
+    <p:sldId xmlns:r="http://schemas.openxmlformats.org/officeDocument/2006/relationships" id="260" r:id="R993c959af2ed42dd"/>
+    <p:sldId xmlns:r="http://schemas.openxmlformats.org/officeDocument/2006/relationships" id="261" r:id="R6ad0e8a70ce74962"/>
+    <p:sldId xmlns:r="http://schemas.openxmlformats.org/officeDocument/2006/relationships" id="262" r:id="Rde2cd7669c664940"/>
+    <p:sldId xmlns:r="http://schemas.openxmlformats.org/officeDocument/2006/relationships" id="263" r:id="R960e63143126479e"/>
+    <p:sldId xmlns:r="http://schemas.openxmlformats.org/officeDocument/2006/relationships" id="264" r:id="R1afaf143958b4069"/>
+    <p:sldId xmlns:r="http://schemas.openxmlformats.org/officeDocument/2006/relationships" id="265" r:id="Ra3598427da44412f"/>
+    <p:sldId xmlns:r="http://schemas.openxmlformats.org/officeDocument/2006/relationships" id="266" r:id="R66f9afb7f0f34a3e"/>
+    <p:sldId xmlns:r="http://schemas.openxmlformats.org/officeDocument/2006/relationships" id="267" r:id="R03e1617339f94463"/>
   </p:sldIdLst>
   <p:sldSz cx="12192000" cy="6858000"/>
   <p:notesSz cx="6858000" cy="9144000"/>
@@ -873,7 +873,7 @@
           <a:lstStyle xmlns:a="http://schemas.openxmlformats.org/drawingml/2006/main"/>
           <a:p xmlns:a="http://schemas.openxmlformats.org/drawingml/2006/main">
             <a:r>
-              <a:t>I do. Reveal the question, setup and each calculation stage one click at a time. Pupils watch before copying. Model answer: About 6,800 x 50 = 340,000.</a:t>
+              <a:t>I do. Reveal the question, then reveal each mathematical change one click at a time. Point to the numbers and operation that changed before moving to the next line. Final answer: About 6,800 x 50 = 340,000.</a:t>
             </a:r>
           </a:p>
         </p:txBody>
@@ -1291,7 +1291,7 @@
   </p:cSld>
   <p:clrMap bg1="lt1" tx1="dk1" bg2="lt2" tx2="dk2" accent1="accent1" accent2="accent2" accent3="accent3" accent4="accent4" accent5="accent5" accent6="accent6" hlink="hlink" folHlink="folHlink"/>
   <p:sldLayoutIdLst>
-    <p:sldLayoutId xmlns:r="http://schemas.openxmlformats.org/officeDocument/2006/relationships" id="2147483649" r:id="Ra58cb774bdc647f8"/>
+    <p:sldLayoutId xmlns:r="http://schemas.openxmlformats.org/officeDocument/2006/relationships" id="2147483649" r:id="R39e83e56a34340a0"/>
   </p:sldLayoutIdLst>
   <p:txStyles>
     <p:titleStyle>
@@ -1842,7 +1842,7 @@
           <p:cNvPr id="12" name="">
             <a:extLst xmlns:a="http://schemas.openxmlformats.org/drawingml/2006/main">
               <a:ext uri="{FF2B5EF4-FFF2-40B4-BE49-F238E27FC236}">
-                <a16:creationId xmlns:a16="http://schemas.microsoft.com/office/drawing/2014/main" id="{B94D1C28-0AC8-47B4-9058-FCB080EC26F2}"/>
+                <a16:creationId xmlns:a16="http://schemas.microsoft.com/office/drawing/2014/main" id="{75E6E551-2955-4BE5-8F73-BD70DD5D1005}"/>
               </a:ext>
             </a:extLst>
           </p:cNvPr>
@@ -1874,7 +1874,7 @@
           <p:cNvPr id="2" name="">
             <a:extLst xmlns:a="http://schemas.openxmlformats.org/drawingml/2006/main">
               <a:ext uri="{FF2B5EF4-FFF2-40B4-BE49-F238E27FC236}">
-                <a16:creationId xmlns:a16="http://schemas.microsoft.com/office/drawing/2014/main" id="{2CAC4857-F28A-4F49-BC18-474EE83EC43F}"/>
+                <a16:creationId xmlns:a16="http://schemas.microsoft.com/office/drawing/2014/main" id="{68F105A5-C060-4615-AD78-8569CBCB4539}"/>
               </a:ext>
             </a:extLst>
           </p:cNvPr>
@@ -1931,7 +1931,7 @@
           <p:cNvPr id="3" name="">
             <a:extLst xmlns:a="http://schemas.openxmlformats.org/drawingml/2006/main">
               <a:ext uri="{FF2B5EF4-FFF2-40B4-BE49-F238E27FC236}">
-                <a16:creationId xmlns:a16="http://schemas.microsoft.com/office/drawing/2014/main" id="{2BC1ED1A-D63E-4303-B624-FBA19E1645D6}"/>
+                <a16:creationId xmlns:a16="http://schemas.microsoft.com/office/drawing/2014/main" id="{8281ACD2-BFB1-4379-AE69-94558EACCED1}"/>
               </a:ext>
             </a:extLst>
           </p:cNvPr>
@@ -1965,7 +1965,7 @@
           <p:cNvPr id="4" name="">
             <a:extLst xmlns:a="http://schemas.openxmlformats.org/drawingml/2006/main">
               <a:ext uri="{FF2B5EF4-FFF2-40B4-BE49-F238E27FC236}">
-                <a16:creationId xmlns:a16="http://schemas.microsoft.com/office/drawing/2014/main" id="{B9EEB85D-66AD-4472-BF89-93C1075BCBEC}"/>
+                <a16:creationId xmlns:a16="http://schemas.microsoft.com/office/drawing/2014/main" id="{B0820AFB-848C-4899-B63F-5C22EA98150B}"/>
               </a:ext>
             </a:extLst>
           </p:cNvPr>
@@ -2022,7 +2022,7 @@
           <p:cNvPr id="5" name="">
             <a:extLst xmlns:a="http://schemas.openxmlformats.org/drawingml/2006/main">
               <a:ext uri="{FF2B5EF4-FFF2-40B4-BE49-F238E27FC236}">
-                <a16:creationId xmlns:a16="http://schemas.microsoft.com/office/drawing/2014/main" id="{F33D0D49-5580-4E14-AA90-B3FE9816EDC5}"/>
+                <a16:creationId xmlns:a16="http://schemas.microsoft.com/office/drawing/2014/main" id="{9392667D-DC92-49A3-A503-35808B081195}"/>
               </a:ext>
             </a:extLst>
           </p:cNvPr>
@@ -2079,7 +2079,7 @@
           <p:cNvPr id="6" name="">
             <a:extLst xmlns:a="http://schemas.openxmlformats.org/drawingml/2006/main">
               <a:ext uri="{FF2B5EF4-FFF2-40B4-BE49-F238E27FC236}">
-                <a16:creationId xmlns:a16="http://schemas.microsoft.com/office/drawing/2014/main" id="{D5C1DEEF-7FAF-4BAD-A760-211A76166990}"/>
+                <a16:creationId xmlns:a16="http://schemas.microsoft.com/office/drawing/2014/main" id="{577E6E58-827C-4DBD-A919-BF52E55134A9}"/>
               </a:ext>
             </a:extLst>
           </p:cNvPr>
@@ -2113,7 +2113,7 @@
           <p:cNvPr id="7" name="">
             <a:extLst xmlns:a="http://schemas.openxmlformats.org/drawingml/2006/main">
               <a:ext uri="{FF2B5EF4-FFF2-40B4-BE49-F238E27FC236}">
-                <a16:creationId xmlns:a16="http://schemas.microsoft.com/office/drawing/2014/main" id="{5B6BD670-A758-4ED3-92A5-5A5C3DCEB998}"/>
+                <a16:creationId xmlns:a16="http://schemas.microsoft.com/office/drawing/2014/main" id="{BF14EA4F-34E9-48BB-83CC-9A55924C3405}"/>
               </a:ext>
             </a:extLst>
           </p:cNvPr>
@@ -2170,7 +2170,7 @@
           <p:cNvPr id="8" name="">
             <a:extLst xmlns:a="http://schemas.openxmlformats.org/drawingml/2006/main">
               <a:ext uri="{FF2B5EF4-FFF2-40B4-BE49-F238E27FC236}">
-                <a16:creationId xmlns:a16="http://schemas.microsoft.com/office/drawing/2014/main" id="{2F733A5B-955F-4AB6-BAF1-475488F8F97E}"/>
+                <a16:creationId xmlns:a16="http://schemas.microsoft.com/office/drawing/2014/main" id="{2AE586B1-9B03-4E70-BA72-EC8D68EBA988}"/>
               </a:ext>
             </a:extLst>
           </p:cNvPr>
@@ -2227,7 +2227,7 @@
           <p:cNvPr id="9" name="">
             <a:extLst xmlns:a="http://schemas.openxmlformats.org/drawingml/2006/main">
               <a:ext uri="{FF2B5EF4-FFF2-40B4-BE49-F238E27FC236}">
-                <a16:creationId xmlns:a16="http://schemas.microsoft.com/office/drawing/2014/main" id="{1A8B77E4-6518-4829-90E6-BA5A6C3A4300}"/>
+                <a16:creationId xmlns:a16="http://schemas.microsoft.com/office/drawing/2014/main" id="{3325BE8E-4CDE-40E4-96C0-CF567272DBC9}"/>
               </a:ext>
             </a:extLst>
           </p:cNvPr>
@@ -2284,7 +2284,7 @@
           <p:cNvPr id="10" name="">
             <a:extLst xmlns:a="http://schemas.openxmlformats.org/drawingml/2006/main">
               <a:ext uri="{FF2B5EF4-FFF2-40B4-BE49-F238E27FC236}">
-                <a16:creationId xmlns:a16="http://schemas.microsoft.com/office/drawing/2014/main" id="{7806F515-B758-42D6-AA79-321470C86576}"/>
+                <a16:creationId xmlns:a16="http://schemas.microsoft.com/office/drawing/2014/main" id="{3B1336CC-09A1-40EE-8DA7-F52BF1A938D9}"/>
               </a:ext>
             </a:extLst>
           </p:cNvPr>
@@ -2341,7 +2341,7 @@
           <p:cNvPr id="11" name="">
             <a:extLst xmlns:a="http://schemas.openxmlformats.org/drawingml/2006/main">
               <a:ext uri="{FF2B5EF4-FFF2-40B4-BE49-F238E27FC236}">
-                <a16:creationId xmlns:a16="http://schemas.microsoft.com/office/drawing/2014/main" id="{0E5E0FF4-866F-40CB-8108-93CBC8D1E9A0}"/>
+                <a16:creationId xmlns:a16="http://schemas.microsoft.com/office/drawing/2014/main" id="{F82D86E5-8D5C-4A3C-8EC5-A2D5EC8AD8D6}"/>
               </a:ext>
             </a:extLst>
           </p:cNvPr>
@@ -2396,7 +2396,7 @@
     </p:spTree>
     <p:extLst>
       <p:ext uri="{BB962C8B-B14F-4D97-AF65-F5344CB8AC3E}">
-        <p14:creationId xmlns:p14="http://schemas.microsoft.com/office/powerpoint/2010/main" val="1510972999"/>
+        <p14:creationId xmlns:p14="http://schemas.microsoft.com/office/powerpoint/2010/main" val="1126682341"/>
       </p:ext>
     </p:extLst>
   </p:cSld>
@@ -2427,7 +2427,7 @@
           <p:cNvPr id="14" name="">
             <a:extLst xmlns:a="http://schemas.openxmlformats.org/drawingml/2006/main">
               <a:ext uri="{FF2B5EF4-FFF2-40B4-BE49-F238E27FC236}">
-                <a16:creationId xmlns:a16="http://schemas.microsoft.com/office/drawing/2014/main" id="{11BC3388-D6BC-480D-AA18-2CE9C4E078B0}"/>
+                <a16:creationId xmlns:a16="http://schemas.microsoft.com/office/drawing/2014/main" id="{7D670509-9552-4C74-9E99-90CF562BB101}"/>
               </a:ext>
             </a:extLst>
           </p:cNvPr>
@@ -2459,7 +2459,7 @@
           <p:cNvPr id="2" name="">
             <a:extLst xmlns:a="http://schemas.openxmlformats.org/drawingml/2006/main">
               <a:ext uri="{FF2B5EF4-FFF2-40B4-BE49-F238E27FC236}">
-                <a16:creationId xmlns:a16="http://schemas.microsoft.com/office/drawing/2014/main" id="{8B4D2D09-05EA-4075-8D3F-7C03D0A0C007}"/>
+                <a16:creationId xmlns:a16="http://schemas.microsoft.com/office/drawing/2014/main" id="{3C0BA8F6-718F-4D35-BF81-8B88CEEB09B5}"/>
               </a:ext>
             </a:extLst>
           </p:cNvPr>
@@ -2516,7 +2516,7 @@
           <p:cNvPr id="3" name="">
             <a:extLst xmlns:a="http://schemas.openxmlformats.org/drawingml/2006/main">
               <a:ext uri="{FF2B5EF4-FFF2-40B4-BE49-F238E27FC236}">
-                <a16:creationId xmlns:a16="http://schemas.microsoft.com/office/drawing/2014/main" id="{CDD5E59D-3FD9-4A06-AC23-877FE6F3718F}"/>
+                <a16:creationId xmlns:a16="http://schemas.microsoft.com/office/drawing/2014/main" id="{BEEFC32E-3F6C-4A26-974D-C5304046E934}"/>
               </a:ext>
             </a:extLst>
           </p:cNvPr>
@@ -2548,7 +2548,7 @@
           <p:cNvPr id="4" name="">
             <a:extLst xmlns:a="http://schemas.openxmlformats.org/drawingml/2006/main">
               <a:ext uri="{FF2B5EF4-FFF2-40B4-BE49-F238E27FC236}">
-                <a16:creationId xmlns:a16="http://schemas.microsoft.com/office/drawing/2014/main" id="{EF026951-7FAD-4118-8780-62D4DA0F2169}"/>
+                <a16:creationId xmlns:a16="http://schemas.microsoft.com/office/drawing/2014/main" id="{AC6D611D-6049-4F1E-8275-0274CED43430}"/>
               </a:ext>
             </a:extLst>
           </p:cNvPr>
@@ -2605,7 +2605,7 @@
           <p:cNvPr id="5" name="">
             <a:extLst xmlns:a="http://schemas.openxmlformats.org/drawingml/2006/main">
               <a:ext uri="{FF2B5EF4-FFF2-40B4-BE49-F238E27FC236}">
-                <a16:creationId xmlns:a16="http://schemas.microsoft.com/office/drawing/2014/main" id="{A6E302B4-BC27-4088-B1A2-2D86CF44C5CB}"/>
+                <a16:creationId xmlns:a16="http://schemas.microsoft.com/office/drawing/2014/main" id="{50C4C06D-3B16-44C0-80B8-A0A7A8962944}"/>
               </a:ext>
             </a:extLst>
           </p:cNvPr>
@@ -2662,7 +2662,7 @@
           <p:cNvPr id="6" name="">
             <a:extLst xmlns:a="http://schemas.openxmlformats.org/drawingml/2006/main">
               <a:ext uri="{FF2B5EF4-FFF2-40B4-BE49-F238E27FC236}">
-                <a16:creationId xmlns:a16="http://schemas.microsoft.com/office/drawing/2014/main" id="{810D308F-B3D9-44B1-9568-3B3E5AF27075}"/>
+                <a16:creationId xmlns:a16="http://schemas.microsoft.com/office/drawing/2014/main" id="{42AF5324-C7EF-4506-BA3B-27A69FEB6155}"/>
               </a:ext>
             </a:extLst>
           </p:cNvPr>
@@ -2719,7 +2719,7 @@
           <p:cNvPr id="7" name="">
             <a:extLst xmlns:a="http://schemas.openxmlformats.org/drawingml/2006/main">
               <a:ext uri="{FF2B5EF4-FFF2-40B4-BE49-F238E27FC236}">
-                <a16:creationId xmlns:a16="http://schemas.microsoft.com/office/drawing/2014/main" id="{19DCA588-B459-471A-93CE-38A40AAD14E4}"/>
+                <a16:creationId xmlns:a16="http://schemas.microsoft.com/office/drawing/2014/main" id="{8A8BA054-CA65-4B64-8FD4-0768762AF288}"/>
               </a:ext>
             </a:extLst>
           </p:cNvPr>
@@ -2751,7 +2751,7 @@
           <p:cNvPr id="8" name="">
             <a:extLst xmlns:a="http://schemas.openxmlformats.org/drawingml/2006/main">
               <a:ext uri="{FF2B5EF4-FFF2-40B4-BE49-F238E27FC236}">
-                <a16:creationId xmlns:a16="http://schemas.microsoft.com/office/drawing/2014/main" id="{380E33DC-9BB0-43DB-956D-A7D86AE57914}"/>
+                <a16:creationId xmlns:a16="http://schemas.microsoft.com/office/drawing/2014/main" id="{54277CF0-1EEF-4311-9796-F10A4903F30A}"/>
               </a:ext>
             </a:extLst>
           </p:cNvPr>
@@ -2808,7 +2808,7 @@
           <p:cNvPr id="9" name="">
             <a:extLst xmlns:a="http://schemas.openxmlformats.org/drawingml/2006/main">
               <a:ext uri="{FF2B5EF4-FFF2-40B4-BE49-F238E27FC236}">
-                <a16:creationId xmlns:a16="http://schemas.microsoft.com/office/drawing/2014/main" id="{5C8DDA68-8C61-496F-9529-18AA4F7051BB}"/>
+                <a16:creationId xmlns:a16="http://schemas.microsoft.com/office/drawing/2014/main" id="{30CCA80D-0E41-4AA6-8A98-ED6A89FC79E2}"/>
               </a:ext>
             </a:extLst>
           </p:cNvPr>
@@ -2865,7 +2865,7 @@
           <p:cNvPr id="10" name="">
             <a:extLst xmlns:a="http://schemas.openxmlformats.org/drawingml/2006/main">
               <a:ext uri="{FF2B5EF4-FFF2-40B4-BE49-F238E27FC236}">
-                <a16:creationId xmlns:a16="http://schemas.microsoft.com/office/drawing/2014/main" id="{9714D7F3-A787-4497-A02C-D695CFA39C79}"/>
+                <a16:creationId xmlns:a16="http://schemas.microsoft.com/office/drawing/2014/main" id="{2000C3C9-9BA6-4F9A-941E-BDF4319336B3}"/>
               </a:ext>
             </a:extLst>
           </p:cNvPr>
@@ -2922,7 +2922,7 @@
           <p:cNvPr id="11" name="">
             <a:extLst xmlns:a="http://schemas.openxmlformats.org/drawingml/2006/main">
               <a:ext uri="{FF2B5EF4-FFF2-40B4-BE49-F238E27FC236}">
-                <a16:creationId xmlns:a16="http://schemas.microsoft.com/office/drawing/2014/main" id="{4FC2DFFB-6D2D-4D86-B8D2-3E1529E08531}"/>
+                <a16:creationId xmlns:a16="http://schemas.microsoft.com/office/drawing/2014/main" id="{52BF096C-A905-4089-8BD5-8214ACFFAAEE}"/>
               </a:ext>
             </a:extLst>
           </p:cNvPr>
@@ -2979,7 +2979,7 @@
           <p:cNvPr id="12" name="">
             <a:extLst xmlns:a="http://schemas.openxmlformats.org/drawingml/2006/main">
               <a:ext uri="{FF2B5EF4-FFF2-40B4-BE49-F238E27FC236}">
-                <a16:creationId xmlns:a16="http://schemas.microsoft.com/office/drawing/2014/main" id="{9DCF143F-D398-46C3-92CF-D6C022ED8648}"/>
+                <a16:creationId xmlns:a16="http://schemas.microsoft.com/office/drawing/2014/main" id="{0FD8400F-5200-4DE3-84D8-6C3A5590AFB6}"/>
               </a:ext>
             </a:extLst>
           </p:cNvPr>
@@ -3036,7 +3036,7 @@
           <p:cNvPr id="13" name="">
             <a:extLst xmlns:a="http://schemas.openxmlformats.org/drawingml/2006/main">
               <a:ext uri="{FF2B5EF4-FFF2-40B4-BE49-F238E27FC236}">
-                <a16:creationId xmlns:a16="http://schemas.microsoft.com/office/drawing/2014/main" id="{EF309820-B326-43F2-87CE-187F137FE0F5}"/>
+                <a16:creationId xmlns:a16="http://schemas.microsoft.com/office/drawing/2014/main" id="{8465BE53-0886-457D-B234-8C41134E4D8D}"/>
               </a:ext>
             </a:extLst>
           </p:cNvPr>
@@ -3091,7 +3091,7 @@
     </p:spTree>
     <p:extLst>
       <p:ext uri="{BB962C8B-B14F-4D97-AF65-F5344CB8AC3E}">
-        <p14:creationId xmlns:p14="http://schemas.microsoft.com/office/powerpoint/2010/main" val="1365019746"/>
+        <p14:creationId xmlns:p14="http://schemas.microsoft.com/office/powerpoint/2010/main" val="402490968"/>
       </p:ext>
     </p:extLst>
   </p:cSld>
@@ -3292,7 +3292,7 @@
           <p:cNvPr id="19" name="">
             <a:extLst xmlns:a="http://schemas.openxmlformats.org/drawingml/2006/main">
               <a:ext uri="{FF2B5EF4-FFF2-40B4-BE49-F238E27FC236}">
-                <a16:creationId xmlns:a16="http://schemas.microsoft.com/office/drawing/2014/main" id="{52ADC82A-CE38-4C35-A0E9-306E1A2623D3}"/>
+                <a16:creationId xmlns:a16="http://schemas.microsoft.com/office/drawing/2014/main" id="{02325997-970C-4111-B09F-64DCE3C5B1FB}"/>
               </a:ext>
             </a:extLst>
           </p:cNvPr>
@@ -3324,7 +3324,7 @@
           <p:cNvPr id="2" name="">
             <a:extLst xmlns:a="http://schemas.openxmlformats.org/drawingml/2006/main">
               <a:ext uri="{FF2B5EF4-FFF2-40B4-BE49-F238E27FC236}">
-                <a16:creationId xmlns:a16="http://schemas.microsoft.com/office/drawing/2014/main" id="{5C3FF90E-ECEA-4CD6-A46E-8BF200B9E1B8}"/>
+                <a16:creationId xmlns:a16="http://schemas.microsoft.com/office/drawing/2014/main" id="{1BD39A05-E823-4EA4-A009-1DBB0686FF36}"/>
               </a:ext>
             </a:extLst>
           </p:cNvPr>
@@ -3381,7 +3381,7 @@
           <p:cNvPr id="3" name="">
             <a:extLst xmlns:a="http://schemas.openxmlformats.org/drawingml/2006/main">
               <a:ext uri="{FF2B5EF4-FFF2-40B4-BE49-F238E27FC236}">
-                <a16:creationId xmlns:a16="http://schemas.microsoft.com/office/drawing/2014/main" id="{91CC9418-935D-4A8F-BB43-67FCEE5E2A01}"/>
+                <a16:creationId xmlns:a16="http://schemas.microsoft.com/office/drawing/2014/main" id="{04CAC5C2-48C6-4C6F-828E-A418C3378E57}"/>
               </a:ext>
             </a:extLst>
           </p:cNvPr>
@@ -3413,7 +3413,7 @@
           <p:cNvPr id="4" name="">
             <a:extLst xmlns:a="http://schemas.openxmlformats.org/drawingml/2006/main">
               <a:ext uri="{FF2B5EF4-FFF2-40B4-BE49-F238E27FC236}">
-                <a16:creationId xmlns:a16="http://schemas.microsoft.com/office/drawing/2014/main" id="{D5E8A274-1362-45D5-A794-392AD53F3DD9}"/>
+                <a16:creationId xmlns:a16="http://schemas.microsoft.com/office/drawing/2014/main" id="{69298409-A9B3-40B3-8346-F90107F8891C}"/>
               </a:ext>
             </a:extLst>
           </p:cNvPr>
@@ -3470,7 +3470,7 @@
           <p:cNvPr id="5" name="">
             <a:extLst xmlns:a="http://schemas.openxmlformats.org/drawingml/2006/main">
               <a:ext uri="{FF2B5EF4-FFF2-40B4-BE49-F238E27FC236}">
-                <a16:creationId xmlns:a16="http://schemas.microsoft.com/office/drawing/2014/main" id="{D383AAF9-698C-487B-B9DE-4FBA594EBB8A}"/>
+                <a16:creationId xmlns:a16="http://schemas.microsoft.com/office/drawing/2014/main" id="{284B12F6-FA35-499D-8859-2F7692EB0A77}"/>
               </a:ext>
             </a:extLst>
           </p:cNvPr>
@@ -3527,7 +3527,7 @@
           <p:cNvPr id="6" name="">
             <a:extLst xmlns:a="http://schemas.openxmlformats.org/drawingml/2006/main">
               <a:ext uri="{FF2B5EF4-FFF2-40B4-BE49-F238E27FC236}">
-                <a16:creationId xmlns:a16="http://schemas.microsoft.com/office/drawing/2014/main" id="{BECE9505-DF21-4A4D-9F2C-F6363754798D}"/>
+                <a16:creationId xmlns:a16="http://schemas.microsoft.com/office/drawing/2014/main" id="{943EEADB-C3B3-4396-9C10-A8E79C60E997}"/>
               </a:ext>
             </a:extLst>
           </p:cNvPr>
@@ -3584,7 +3584,7 @@
           <p:cNvPr id="7" name="">
             <a:extLst xmlns:a="http://schemas.openxmlformats.org/drawingml/2006/main">
               <a:ext uri="{FF2B5EF4-FFF2-40B4-BE49-F238E27FC236}">
-                <a16:creationId xmlns:a16="http://schemas.microsoft.com/office/drawing/2014/main" id="{66D9EE6A-286B-4236-9633-9108C068390F}"/>
+                <a16:creationId xmlns:a16="http://schemas.microsoft.com/office/drawing/2014/main" id="{24BEAB56-1A73-465F-9A92-80A59375F268}"/>
               </a:ext>
             </a:extLst>
           </p:cNvPr>
@@ -3616,7 +3616,7 @@
           <p:cNvPr id="8" name="">
             <a:extLst xmlns:a="http://schemas.openxmlformats.org/drawingml/2006/main">
               <a:ext uri="{FF2B5EF4-FFF2-40B4-BE49-F238E27FC236}">
-                <a16:creationId xmlns:a16="http://schemas.microsoft.com/office/drawing/2014/main" id="{ED77BE06-6F0B-4967-A0B7-D2D52588DDB9}"/>
+                <a16:creationId xmlns:a16="http://schemas.microsoft.com/office/drawing/2014/main" id="{8C8A94B7-3E5B-43ED-9544-3E978496E1F7}"/>
               </a:ext>
             </a:extLst>
           </p:cNvPr>
@@ -3673,7 +3673,7 @@
           <p:cNvPr id="9" name="">
             <a:extLst xmlns:a="http://schemas.openxmlformats.org/drawingml/2006/main">
               <a:ext uri="{FF2B5EF4-FFF2-40B4-BE49-F238E27FC236}">
-                <a16:creationId xmlns:a16="http://schemas.microsoft.com/office/drawing/2014/main" id="{D3F2F524-8CC4-42BA-9C6B-FE62AE35D155}"/>
+                <a16:creationId xmlns:a16="http://schemas.microsoft.com/office/drawing/2014/main" id="{C0B2925C-C29E-4721-AD7F-304008C3D5F2}"/>
               </a:ext>
             </a:extLst>
           </p:cNvPr>
@@ -3730,7 +3730,7 @@
           <p:cNvPr id="10" name="">
             <a:extLst xmlns:a="http://schemas.openxmlformats.org/drawingml/2006/main">
               <a:ext uri="{FF2B5EF4-FFF2-40B4-BE49-F238E27FC236}">
-                <a16:creationId xmlns:a16="http://schemas.microsoft.com/office/drawing/2014/main" id="{F926CA38-F4B8-4F65-83A0-F67323B037A0}"/>
+                <a16:creationId xmlns:a16="http://schemas.microsoft.com/office/drawing/2014/main" id="{BF7BD4B3-72DC-44E5-9D7F-2B9680AC3B4B}"/>
               </a:ext>
             </a:extLst>
           </p:cNvPr>
@@ -3787,7 +3787,7 @@
           <p:cNvPr id="11" name="">
             <a:extLst xmlns:a="http://schemas.openxmlformats.org/drawingml/2006/main">
               <a:ext uri="{FF2B5EF4-FFF2-40B4-BE49-F238E27FC236}">
-                <a16:creationId xmlns:a16="http://schemas.microsoft.com/office/drawing/2014/main" id="{9F71AF4B-41CA-4C46-8918-851FC7E77DED}"/>
+                <a16:creationId xmlns:a16="http://schemas.microsoft.com/office/drawing/2014/main" id="{15432A4D-36AD-447C-91E6-0D88FA300129}"/>
               </a:ext>
             </a:extLst>
           </p:cNvPr>
@@ -3821,7 +3821,7 @@
           <p:cNvPr id="12" name="">
             <a:extLst xmlns:a="http://schemas.openxmlformats.org/drawingml/2006/main">
               <a:ext uri="{FF2B5EF4-FFF2-40B4-BE49-F238E27FC236}">
-                <a16:creationId xmlns:a16="http://schemas.microsoft.com/office/drawing/2014/main" id="{EE427BB9-2446-4080-B337-475D2C40EE5A}"/>
+                <a16:creationId xmlns:a16="http://schemas.microsoft.com/office/drawing/2014/main" id="{37DD72A5-11D6-4595-8400-4A8F01CBC5DB}"/>
               </a:ext>
             </a:extLst>
           </p:cNvPr>
@@ -3878,7 +3878,7 @@
           <p:cNvPr id="13" name="">
             <a:extLst xmlns:a="http://schemas.openxmlformats.org/drawingml/2006/main">
               <a:ext uri="{FF2B5EF4-FFF2-40B4-BE49-F238E27FC236}">
-                <a16:creationId xmlns:a16="http://schemas.microsoft.com/office/drawing/2014/main" id="{5C62C62E-8639-4126-ABD0-A7CD47C34740}"/>
+                <a16:creationId xmlns:a16="http://schemas.microsoft.com/office/drawing/2014/main" id="{08479137-9176-4C14-A46A-69FB2C7E431A}"/>
               </a:ext>
             </a:extLst>
           </p:cNvPr>
@@ -3935,7 +3935,7 @@
           <p:cNvPr id="14" name="">
             <a:extLst xmlns:a="http://schemas.openxmlformats.org/drawingml/2006/main">
               <a:ext uri="{FF2B5EF4-FFF2-40B4-BE49-F238E27FC236}">
-                <a16:creationId xmlns:a16="http://schemas.microsoft.com/office/drawing/2014/main" id="{7BA49D8A-6E7F-4A74-99BF-9857472F7DEF}"/>
+                <a16:creationId xmlns:a16="http://schemas.microsoft.com/office/drawing/2014/main" id="{9CC51F9C-4021-4199-B089-0B8FCF3A67BE}"/>
               </a:ext>
             </a:extLst>
           </p:cNvPr>
@@ -3992,7 +3992,7 @@
           <p:cNvPr id="15" name="">
             <a:extLst xmlns:a="http://schemas.openxmlformats.org/drawingml/2006/main">
               <a:ext uri="{FF2B5EF4-FFF2-40B4-BE49-F238E27FC236}">
-                <a16:creationId xmlns:a16="http://schemas.microsoft.com/office/drawing/2014/main" id="{BABB1BE8-D075-4387-840B-9EB3ECA2632B}"/>
+                <a16:creationId xmlns:a16="http://schemas.microsoft.com/office/drawing/2014/main" id="{2D694E24-089C-4687-B187-8E8DB478C309}"/>
               </a:ext>
             </a:extLst>
           </p:cNvPr>
@@ -4026,7 +4026,7 @@
           <p:cNvPr id="16" name="">
             <a:extLst xmlns:a="http://schemas.openxmlformats.org/drawingml/2006/main">
               <a:ext uri="{FF2B5EF4-FFF2-40B4-BE49-F238E27FC236}">
-                <a16:creationId xmlns:a16="http://schemas.microsoft.com/office/drawing/2014/main" id="{4D8015B1-7B64-4085-B42D-C542043A783D}"/>
+                <a16:creationId xmlns:a16="http://schemas.microsoft.com/office/drawing/2014/main" id="{99683311-0333-45F7-A0D6-A2D53FE069ED}"/>
               </a:ext>
             </a:extLst>
           </p:cNvPr>
@@ -4083,7 +4083,7 @@
           <p:cNvPr id="17" name="">
             <a:extLst xmlns:a="http://schemas.openxmlformats.org/drawingml/2006/main">
               <a:ext uri="{FF2B5EF4-FFF2-40B4-BE49-F238E27FC236}">
-                <a16:creationId xmlns:a16="http://schemas.microsoft.com/office/drawing/2014/main" id="{F27B340A-F1CC-4956-A64E-DE937900E6C7}"/>
+                <a16:creationId xmlns:a16="http://schemas.microsoft.com/office/drawing/2014/main" id="{EED328CA-6AB7-4EB6-8E57-671529D1B27F}"/>
               </a:ext>
             </a:extLst>
           </p:cNvPr>
@@ -4140,7 +4140,7 @@
           <p:cNvPr id="18" name="">
             <a:extLst xmlns:a="http://schemas.openxmlformats.org/drawingml/2006/main">
               <a:ext uri="{FF2B5EF4-FFF2-40B4-BE49-F238E27FC236}">
-                <a16:creationId xmlns:a16="http://schemas.microsoft.com/office/drawing/2014/main" id="{D2C3C697-C128-4568-942C-6B8E35B744B3}"/>
+                <a16:creationId xmlns:a16="http://schemas.microsoft.com/office/drawing/2014/main" id="{40E6444C-DAB8-41C6-B4C8-7AA9EEB561B5}"/>
               </a:ext>
             </a:extLst>
           </p:cNvPr>
@@ -4195,7 +4195,7 @@
     </p:spTree>
     <p:extLst>
       <p:ext uri="{BB962C8B-B14F-4D97-AF65-F5344CB8AC3E}">
-        <p14:creationId xmlns:p14="http://schemas.microsoft.com/office/powerpoint/2010/main" val="73151346"/>
+        <p14:creationId xmlns:p14="http://schemas.microsoft.com/office/powerpoint/2010/main" val="1553362225"/>
       </p:ext>
     </p:extLst>
   </p:cSld>
@@ -4350,7 +4350,7 @@
           <p:cNvPr id="23" name="">
             <a:extLst xmlns:a="http://schemas.openxmlformats.org/drawingml/2006/main">
               <a:ext uri="{FF2B5EF4-FFF2-40B4-BE49-F238E27FC236}">
-                <a16:creationId xmlns:a16="http://schemas.microsoft.com/office/drawing/2014/main" id="{B26325B4-EB53-450C-B5F5-FA5CF0CF45AB}"/>
+                <a16:creationId xmlns:a16="http://schemas.microsoft.com/office/drawing/2014/main" id="{695925EF-C299-4FCA-A6A9-6F1C55AF8D98}"/>
               </a:ext>
             </a:extLst>
           </p:cNvPr>
@@ -4382,7 +4382,7 @@
           <p:cNvPr id="2" name="">
             <a:extLst xmlns:a="http://schemas.openxmlformats.org/drawingml/2006/main">
               <a:ext uri="{FF2B5EF4-FFF2-40B4-BE49-F238E27FC236}">
-                <a16:creationId xmlns:a16="http://schemas.microsoft.com/office/drawing/2014/main" id="{14E1B054-B4DD-422D-8C23-D5F97F756E3F}"/>
+                <a16:creationId xmlns:a16="http://schemas.microsoft.com/office/drawing/2014/main" id="{0702C0E8-354D-464F-B395-B30C3C96F110}"/>
               </a:ext>
             </a:extLst>
           </p:cNvPr>
@@ -4439,7 +4439,7 @@
           <p:cNvPr id="3" name="">
             <a:extLst xmlns:a="http://schemas.openxmlformats.org/drawingml/2006/main">
               <a:ext uri="{FF2B5EF4-FFF2-40B4-BE49-F238E27FC236}">
-                <a16:creationId xmlns:a16="http://schemas.microsoft.com/office/drawing/2014/main" id="{EECE686F-4C05-498C-9380-C3E98DC38B03}"/>
+                <a16:creationId xmlns:a16="http://schemas.microsoft.com/office/drawing/2014/main" id="{7BAB60BD-3779-44C2-AB16-D766EBE7AFF5}"/>
               </a:ext>
             </a:extLst>
           </p:cNvPr>
@@ -4471,7 +4471,7 @@
           <p:cNvPr id="4" name="">
             <a:extLst xmlns:a="http://schemas.openxmlformats.org/drawingml/2006/main">
               <a:ext uri="{FF2B5EF4-FFF2-40B4-BE49-F238E27FC236}">
-                <a16:creationId xmlns:a16="http://schemas.microsoft.com/office/drawing/2014/main" id="{D3BD23C3-DA88-4859-AFB1-7CC3629D1EEE}"/>
+                <a16:creationId xmlns:a16="http://schemas.microsoft.com/office/drawing/2014/main" id="{79CB19EB-8B2D-4B34-B293-918833D8EDA0}"/>
               </a:ext>
             </a:extLst>
           </p:cNvPr>
@@ -4528,7 +4528,7 @@
           <p:cNvPr id="5" name="">
             <a:extLst xmlns:a="http://schemas.openxmlformats.org/drawingml/2006/main">
               <a:ext uri="{FF2B5EF4-FFF2-40B4-BE49-F238E27FC236}">
-                <a16:creationId xmlns:a16="http://schemas.microsoft.com/office/drawing/2014/main" id="{7302A45D-3714-45F9-9021-11E522370831}"/>
+                <a16:creationId xmlns:a16="http://schemas.microsoft.com/office/drawing/2014/main" id="{29D3953E-C36E-4878-B814-1FA45F8BE449}"/>
               </a:ext>
             </a:extLst>
           </p:cNvPr>
@@ -4585,7 +4585,7 @@
           <p:cNvPr id="6" name="">
             <a:extLst xmlns:a="http://schemas.openxmlformats.org/drawingml/2006/main">
               <a:ext uri="{FF2B5EF4-FFF2-40B4-BE49-F238E27FC236}">
-                <a16:creationId xmlns:a16="http://schemas.microsoft.com/office/drawing/2014/main" id="{21EB7C8F-6D21-47F5-A21C-5F430277C7BF}"/>
+                <a16:creationId xmlns:a16="http://schemas.microsoft.com/office/drawing/2014/main" id="{BFF98469-D319-4620-B1ED-8223285A15F2}"/>
               </a:ext>
             </a:extLst>
           </p:cNvPr>
@@ -4642,7 +4642,7 @@
           <p:cNvPr id="7" name="">
             <a:extLst xmlns:a="http://schemas.openxmlformats.org/drawingml/2006/main">
               <a:ext uri="{FF2B5EF4-FFF2-40B4-BE49-F238E27FC236}">
-                <a16:creationId xmlns:a16="http://schemas.microsoft.com/office/drawing/2014/main" id="{AC87B24D-EE2D-445E-A06A-02A69CA3513F}"/>
+                <a16:creationId xmlns:a16="http://schemas.microsoft.com/office/drawing/2014/main" id="{F95EE0E2-46C2-4E30-BF74-BB821AA7C9BC}"/>
               </a:ext>
             </a:extLst>
           </p:cNvPr>
@@ -4674,7 +4674,7 @@
           <p:cNvPr id="8" name="">
             <a:extLst xmlns:a="http://schemas.openxmlformats.org/drawingml/2006/main">
               <a:ext uri="{FF2B5EF4-FFF2-40B4-BE49-F238E27FC236}">
-                <a16:creationId xmlns:a16="http://schemas.microsoft.com/office/drawing/2014/main" id="{DF221944-A109-452F-A719-0E81458D4D77}"/>
+                <a16:creationId xmlns:a16="http://schemas.microsoft.com/office/drawing/2014/main" id="{CA9DFC3C-E9A0-4690-9F67-29D676B461F1}"/>
               </a:ext>
             </a:extLst>
           </p:cNvPr>
@@ -4731,7 +4731,7 @@
           <p:cNvPr id="9" name="">
             <a:extLst xmlns:a="http://schemas.openxmlformats.org/drawingml/2006/main">
               <a:ext uri="{FF2B5EF4-FFF2-40B4-BE49-F238E27FC236}">
-                <a16:creationId xmlns:a16="http://schemas.microsoft.com/office/drawing/2014/main" id="{FCE4C418-4F5E-4492-9B2B-B6206DC82B0F}"/>
+                <a16:creationId xmlns:a16="http://schemas.microsoft.com/office/drawing/2014/main" id="{043819E1-E7FC-4D6D-A5C9-43F8E7D7A68A}"/>
               </a:ext>
             </a:extLst>
           </p:cNvPr>
@@ -4788,7 +4788,7 @@
           <p:cNvPr id="10" name="">
             <a:extLst xmlns:a="http://schemas.openxmlformats.org/drawingml/2006/main">
               <a:ext uri="{FF2B5EF4-FFF2-40B4-BE49-F238E27FC236}">
-                <a16:creationId xmlns:a16="http://schemas.microsoft.com/office/drawing/2014/main" id="{033F557A-E6CA-4132-B7D6-B0A20675FD03}"/>
+                <a16:creationId xmlns:a16="http://schemas.microsoft.com/office/drawing/2014/main" id="{72074873-B459-424E-9115-8189F38D9025}"/>
               </a:ext>
             </a:extLst>
           </p:cNvPr>
@@ -4822,7 +4822,7 @@
           <p:cNvPr id="11" name="">
             <a:extLst xmlns:a="http://schemas.openxmlformats.org/drawingml/2006/main">
               <a:ext uri="{FF2B5EF4-FFF2-40B4-BE49-F238E27FC236}">
-                <a16:creationId xmlns:a16="http://schemas.microsoft.com/office/drawing/2014/main" id="{64A0C03A-5CBD-4FCA-8E6C-F70F2422072E}"/>
+                <a16:creationId xmlns:a16="http://schemas.microsoft.com/office/drawing/2014/main" id="{B7456E57-5FE0-4A64-9BAE-E42F03407567}"/>
               </a:ext>
             </a:extLst>
           </p:cNvPr>
@@ -4854,7 +4854,7 @@
           <p:cNvPr id="12" name="">
             <a:extLst xmlns:a="http://schemas.openxmlformats.org/drawingml/2006/main">
               <a:ext uri="{FF2B5EF4-FFF2-40B4-BE49-F238E27FC236}">
-                <a16:creationId xmlns:a16="http://schemas.microsoft.com/office/drawing/2014/main" id="{56071047-3A94-4797-B326-EBF0EC088762}"/>
+                <a16:creationId xmlns:a16="http://schemas.microsoft.com/office/drawing/2014/main" id="{CBAC2BB9-B66E-476A-A9E3-A83EA61E972B}"/>
               </a:ext>
             </a:extLst>
           </p:cNvPr>
@@ -4911,7 +4911,7 @@
           <p:cNvPr id="13" name="">
             <a:extLst xmlns:a="http://schemas.openxmlformats.org/drawingml/2006/main">
               <a:ext uri="{FF2B5EF4-FFF2-40B4-BE49-F238E27FC236}">
-                <a16:creationId xmlns:a16="http://schemas.microsoft.com/office/drawing/2014/main" id="{120AEC86-212F-4752-9642-2CBA1E0D008D}"/>
+                <a16:creationId xmlns:a16="http://schemas.microsoft.com/office/drawing/2014/main" id="{4C69E621-A0A9-4F24-A15D-0380506BA1B2}"/>
               </a:ext>
             </a:extLst>
           </p:cNvPr>
@@ -4968,7 +4968,7 @@
           <p:cNvPr id="14" name="">
             <a:extLst xmlns:a="http://schemas.openxmlformats.org/drawingml/2006/main">
               <a:ext uri="{FF2B5EF4-FFF2-40B4-BE49-F238E27FC236}">
-                <a16:creationId xmlns:a16="http://schemas.microsoft.com/office/drawing/2014/main" id="{18E13124-994D-4B83-8D27-F01A1D48FA03}"/>
+                <a16:creationId xmlns:a16="http://schemas.microsoft.com/office/drawing/2014/main" id="{F5948C1C-6C83-4A6C-9F83-6DFB2364607D}"/>
               </a:ext>
             </a:extLst>
           </p:cNvPr>
@@ -5002,7 +5002,7 @@
           <p:cNvPr id="15" name="">
             <a:extLst xmlns:a="http://schemas.openxmlformats.org/drawingml/2006/main">
               <a:ext uri="{FF2B5EF4-FFF2-40B4-BE49-F238E27FC236}">
-                <a16:creationId xmlns:a16="http://schemas.microsoft.com/office/drawing/2014/main" id="{BF72EB7F-6D7B-4C23-8B0A-0E10CA524106}"/>
+                <a16:creationId xmlns:a16="http://schemas.microsoft.com/office/drawing/2014/main" id="{B4F6872D-D45F-4CB3-B9E0-B11E9FFC834A}"/>
               </a:ext>
             </a:extLst>
           </p:cNvPr>
@@ -5034,7 +5034,7 @@
           <p:cNvPr id="16" name="">
             <a:extLst xmlns:a="http://schemas.openxmlformats.org/drawingml/2006/main">
               <a:ext uri="{FF2B5EF4-FFF2-40B4-BE49-F238E27FC236}">
-                <a16:creationId xmlns:a16="http://schemas.microsoft.com/office/drawing/2014/main" id="{5ED3CD12-9339-45A7-9A21-EAD4A0F4A8F8}"/>
+                <a16:creationId xmlns:a16="http://schemas.microsoft.com/office/drawing/2014/main" id="{1A45EE12-7D49-4716-9837-2955F5C98F26}"/>
               </a:ext>
             </a:extLst>
           </p:cNvPr>
@@ -5091,7 +5091,7 @@
           <p:cNvPr id="17" name="">
             <a:extLst xmlns:a="http://schemas.openxmlformats.org/drawingml/2006/main">
               <a:ext uri="{FF2B5EF4-FFF2-40B4-BE49-F238E27FC236}">
-                <a16:creationId xmlns:a16="http://schemas.microsoft.com/office/drawing/2014/main" id="{CB04844F-13DF-4BFC-9125-BF91D27EB491}"/>
+                <a16:creationId xmlns:a16="http://schemas.microsoft.com/office/drawing/2014/main" id="{9EA6CB8A-7E3A-4099-A522-48607558C9A2}"/>
               </a:ext>
             </a:extLst>
           </p:cNvPr>
@@ -5148,7 +5148,7 @@
           <p:cNvPr id="18" name="">
             <a:extLst xmlns:a="http://schemas.openxmlformats.org/drawingml/2006/main">
               <a:ext uri="{FF2B5EF4-FFF2-40B4-BE49-F238E27FC236}">
-                <a16:creationId xmlns:a16="http://schemas.microsoft.com/office/drawing/2014/main" id="{9E0AFAEC-0ECF-43C3-8653-8AAFC256CA2E}"/>
+                <a16:creationId xmlns:a16="http://schemas.microsoft.com/office/drawing/2014/main" id="{32EC599A-174B-4F1E-8B5A-00ABE305F268}"/>
               </a:ext>
             </a:extLst>
           </p:cNvPr>
@@ -5182,7 +5182,7 @@
           <p:cNvPr id="19" name="">
             <a:extLst xmlns:a="http://schemas.openxmlformats.org/drawingml/2006/main">
               <a:ext uri="{FF2B5EF4-FFF2-40B4-BE49-F238E27FC236}">
-                <a16:creationId xmlns:a16="http://schemas.microsoft.com/office/drawing/2014/main" id="{40F78A26-B382-4987-B47C-9CFD52FB3A2B}"/>
+                <a16:creationId xmlns:a16="http://schemas.microsoft.com/office/drawing/2014/main" id="{FA188522-442D-450A-9124-E086EB35BB01}"/>
               </a:ext>
             </a:extLst>
           </p:cNvPr>
@@ -5214,7 +5214,7 @@
           <p:cNvPr id="20" name="">
             <a:extLst xmlns:a="http://schemas.openxmlformats.org/drawingml/2006/main">
               <a:ext uri="{FF2B5EF4-FFF2-40B4-BE49-F238E27FC236}">
-                <a16:creationId xmlns:a16="http://schemas.microsoft.com/office/drawing/2014/main" id="{02BE15A8-270B-4B45-A44C-145D7CCB2196}"/>
+                <a16:creationId xmlns:a16="http://schemas.microsoft.com/office/drawing/2014/main" id="{CB62106B-8227-479F-B65A-0C10D81500FC}"/>
               </a:ext>
             </a:extLst>
           </p:cNvPr>
@@ -5271,7 +5271,7 @@
           <p:cNvPr id="21" name="">
             <a:extLst xmlns:a="http://schemas.openxmlformats.org/drawingml/2006/main">
               <a:ext uri="{FF2B5EF4-FFF2-40B4-BE49-F238E27FC236}">
-                <a16:creationId xmlns:a16="http://schemas.microsoft.com/office/drawing/2014/main" id="{D721E41F-8226-4AD3-AF40-4183E051F367}"/>
+                <a16:creationId xmlns:a16="http://schemas.microsoft.com/office/drawing/2014/main" id="{2BF5E78B-286D-4732-99BF-2EAE0587DB5D}"/>
               </a:ext>
             </a:extLst>
           </p:cNvPr>
@@ -5328,7 +5328,7 @@
           <p:cNvPr id="22" name="">
             <a:extLst xmlns:a="http://schemas.openxmlformats.org/drawingml/2006/main">
               <a:ext uri="{FF2B5EF4-FFF2-40B4-BE49-F238E27FC236}">
-                <a16:creationId xmlns:a16="http://schemas.microsoft.com/office/drawing/2014/main" id="{CAFD1A09-EBA4-45EF-B5E2-353A76E1FE8E}"/>
+                <a16:creationId xmlns:a16="http://schemas.microsoft.com/office/drawing/2014/main" id="{3CA27509-BA74-4A47-82BC-B8A4CC6C6703}"/>
               </a:ext>
             </a:extLst>
           </p:cNvPr>
@@ -5383,7 +5383,7 @@
     </p:spTree>
     <p:extLst>
       <p:ext uri="{BB962C8B-B14F-4D97-AF65-F5344CB8AC3E}">
-        <p14:creationId xmlns:p14="http://schemas.microsoft.com/office/powerpoint/2010/main" val="688268535"/>
+        <p14:creationId xmlns:p14="http://schemas.microsoft.com/office/powerpoint/2010/main" val="113260443"/>
       </p:ext>
     </p:extLst>
   </p:cSld>
@@ -5584,7 +5584,7 @@
           <p:cNvPr id="23" name="">
             <a:extLst xmlns:a="http://schemas.openxmlformats.org/drawingml/2006/main">
               <a:ext uri="{FF2B5EF4-FFF2-40B4-BE49-F238E27FC236}">
-                <a16:creationId xmlns:a16="http://schemas.microsoft.com/office/drawing/2014/main" id="{1BF03D44-C3EB-4CC6-BCE7-68A56F490FCB}"/>
+                <a16:creationId xmlns:a16="http://schemas.microsoft.com/office/drawing/2014/main" id="{0484930C-1DFA-4985-BDED-3A634148899B}"/>
               </a:ext>
             </a:extLst>
           </p:cNvPr>
@@ -5616,7 +5616,7 @@
           <p:cNvPr id="2" name="">
             <a:extLst xmlns:a="http://schemas.openxmlformats.org/drawingml/2006/main">
               <a:ext uri="{FF2B5EF4-FFF2-40B4-BE49-F238E27FC236}">
-                <a16:creationId xmlns:a16="http://schemas.microsoft.com/office/drawing/2014/main" id="{664C5165-1050-46DE-909A-D248E006B885}"/>
+                <a16:creationId xmlns:a16="http://schemas.microsoft.com/office/drawing/2014/main" id="{5AD4596F-F0C3-45AB-9D5A-884CA477F621}"/>
               </a:ext>
             </a:extLst>
           </p:cNvPr>
@@ -5673,7 +5673,7 @@
           <p:cNvPr id="3" name="">
             <a:extLst xmlns:a="http://schemas.openxmlformats.org/drawingml/2006/main">
               <a:ext uri="{FF2B5EF4-FFF2-40B4-BE49-F238E27FC236}">
-                <a16:creationId xmlns:a16="http://schemas.microsoft.com/office/drawing/2014/main" id="{6BA23464-428E-479A-B562-F22206DE4B98}"/>
+                <a16:creationId xmlns:a16="http://schemas.microsoft.com/office/drawing/2014/main" id="{541D61A5-1DA7-4800-9D57-AB385A2A9EBF}"/>
               </a:ext>
             </a:extLst>
           </p:cNvPr>
@@ -5705,7 +5705,7 @@
           <p:cNvPr id="4" name="">
             <a:extLst xmlns:a="http://schemas.openxmlformats.org/drawingml/2006/main">
               <a:ext uri="{FF2B5EF4-FFF2-40B4-BE49-F238E27FC236}">
-                <a16:creationId xmlns:a16="http://schemas.microsoft.com/office/drawing/2014/main" id="{E5D81594-3AA6-4F01-8ACB-30A02F9838BC}"/>
+                <a16:creationId xmlns:a16="http://schemas.microsoft.com/office/drawing/2014/main" id="{50595F2D-CB11-43E9-8E51-DFA24C1895F4}"/>
               </a:ext>
             </a:extLst>
           </p:cNvPr>
@@ -5762,7 +5762,7 @@
           <p:cNvPr id="5" name="">
             <a:extLst xmlns:a="http://schemas.openxmlformats.org/drawingml/2006/main">
               <a:ext uri="{FF2B5EF4-FFF2-40B4-BE49-F238E27FC236}">
-                <a16:creationId xmlns:a16="http://schemas.microsoft.com/office/drawing/2014/main" id="{C7E50B39-60CC-4B5F-9913-902541C6D04D}"/>
+                <a16:creationId xmlns:a16="http://schemas.microsoft.com/office/drawing/2014/main" id="{E99BB8A5-A78E-4343-BA88-A252E016A217}"/>
               </a:ext>
             </a:extLst>
           </p:cNvPr>
@@ -5819,7 +5819,7 @@
           <p:cNvPr id="6" name="">
             <a:extLst xmlns:a="http://schemas.openxmlformats.org/drawingml/2006/main">
               <a:ext uri="{FF2B5EF4-FFF2-40B4-BE49-F238E27FC236}">
-                <a16:creationId xmlns:a16="http://schemas.microsoft.com/office/drawing/2014/main" id="{070154E9-1CE1-4370-9A11-C69AC9824937}"/>
+                <a16:creationId xmlns:a16="http://schemas.microsoft.com/office/drawing/2014/main" id="{71CB5638-D397-4FE0-8400-8C354CD2D936}"/>
               </a:ext>
             </a:extLst>
           </p:cNvPr>
@@ -5876,7 +5876,7 @@
           <p:cNvPr id="7" name="">
             <a:extLst xmlns:a="http://schemas.openxmlformats.org/drawingml/2006/main">
               <a:ext uri="{FF2B5EF4-FFF2-40B4-BE49-F238E27FC236}">
-                <a16:creationId xmlns:a16="http://schemas.microsoft.com/office/drawing/2014/main" id="{9444E962-4F51-4724-8DA8-9BF3956C41A2}"/>
+                <a16:creationId xmlns:a16="http://schemas.microsoft.com/office/drawing/2014/main" id="{503020FE-3118-44AD-89E8-99541A0E8058}"/>
               </a:ext>
             </a:extLst>
           </p:cNvPr>
@@ -5908,7 +5908,7 @@
           <p:cNvPr id="8" name="">
             <a:extLst xmlns:a="http://schemas.openxmlformats.org/drawingml/2006/main">
               <a:ext uri="{FF2B5EF4-FFF2-40B4-BE49-F238E27FC236}">
-                <a16:creationId xmlns:a16="http://schemas.microsoft.com/office/drawing/2014/main" id="{A4F4CE69-6383-49E6-BEAF-E20BD95883F5}"/>
+                <a16:creationId xmlns:a16="http://schemas.microsoft.com/office/drawing/2014/main" id="{A353BE9C-E57D-4448-9B47-623FD1B4571F}"/>
               </a:ext>
             </a:extLst>
           </p:cNvPr>
@@ -5965,7 +5965,7 @@
           <p:cNvPr id="9" name="">
             <a:extLst xmlns:a="http://schemas.openxmlformats.org/drawingml/2006/main">
               <a:ext uri="{FF2B5EF4-FFF2-40B4-BE49-F238E27FC236}">
-                <a16:creationId xmlns:a16="http://schemas.microsoft.com/office/drawing/2014/main" id="{5506FE77-5C6E-4EB6-9B35-6E970BBAFD52}"/>
+                <a16:creationId xmlns:a16="http://schemas.microsoft.com/office/drawing/2014/main" id="{6FA18BC5-E6D1-4B0D-9E99-0CAC48991D6E}"/>
               </a:ext>
             </a:extLst>
           </p:cNvPr>
@@ -6022,7 +6022,7 @@
           <p:cNvPr id="10" name="">
             <a:extLst xmlns:a="http://schemas.openxmlformats.org/drawingml/2006/main">
               <a:ext uri="{FF2B5EF4-FFF2-40B4-BE49-F238E27FC236}">
-                <a16:creationId xmlns:a16="http://schemas.microsoft.com/office/drawing/2014/main" id="{49461616-6499-4AB8-9CE7-06E9DF0E1059}"/>
+                <a16:creationId xmlns:a16="http://schemas.microsoft.com/office/drawing/2014/main" id="{5BF025D1-C583-42CA-B547-BB3ECC8A7655}"/>
               </a:ext>
             </a:extLst>
           </p:cNvPr>
@@ -6056,7 +6056,7 @@
           <p:cNvPr id="11" name="">
             <a:extLst xmlns:a="http://schemas.openxmlformats.org/drawingml/2006/main">
               <a:ext uri="{FF2B5EF4-FFF2-40B4-BE49-F238E27FC236}">
-                <a16:creationId xmlns:a16="http://schemas.microsoft.com/office/drawing/2014/main" id="{475A1119-B0C7-4038-AD89-4D803E63289C}"/>
+                <a16:creationId xmlns:a16="http://schemas.microsoft.com/office/drawing/2014/main" id="{6016851E-C0B4-41D1-BD43-58020B764272}"/>
               </a:ext>
             </a:extLst>
           </p:cNvPr>
@@ -6088,7 +6088,7 @@
           <p:cNvPr id="12" name="">
             <a:extLst xmlns:a="http://schemas.openxmlformats.org/drawingml/2006/main">
               <a:ext uri="{FF2B5EF4-FFF2-40B4-BE49-F238E27FC236}">
-                <a16:creationId xmlns:a16="http://schemas.microsoft.com/office/drawing/2014/main" id="{C082D619-92C2-4B24-B010-62AFEB14DF0A}"/>
+                <a16:creationId xmlns:a16="http://schemas.microsoft.com/office/drawing/2014/main" id="{580A2BD1-0BB3-4447-A2BC-7AD94BB4C6B9}"/>
               </a:ext>
             </a:extLst>
           </p:cNvPr>
@@ -6145,7 +6145,7 @@
           <p:cNvPr id="13" name="">
             <a:extLst xmlns:a="http://schemas.openxmlformats.org/drawingml/2006/main">
               <a:ext uri="{FF2B5EF4-FFF2-40B4-BE49-F238E27FC236}">
-                <a16:creationId xmlns:a16="http://schemas.microsoft.com/office/drawing/2014/main" id="{E74F709A-5AD1-4E43-864B-FAF72EA0F707}"/>
+                <a16:creationId xmlns:a16="http://schemas.microsoft.com/office/drawing/2014/main" id="{E0D8E0CE-F415-4E6B-85E4-0A298BE6D4D5}"/>
               </a:ext>
             </a:extLst>
           </p:cNvPr>
@@ -6202,7 +6202,7 @@
           <p:cNvPr id="14" name="">
             <a:extLst xmlns:a="http://schemas.openxmlformats.org/drawingml/2006/main">
               <a:ext uri="{FF2B5EF4-FFF2-40B4-BE49-F238E27FC236}">
-                <a16:creationId xmlns:a16="http://schemas.microsoft.com/office/drawing/2014/main" id="{E7022DBF-F723-4A13-8878-E5B45030BD51}"/>
+                <a16:creationId xmlns:a16="http://schemas.microsoft.com/office/drawing/2014/main" id="{1EF1734D-FE0F-41F2-8723-15CAB63E6509}"/>
               </a:ext>
             </a:extLst>
           </p:cNvPr>
@@ -6236,7 +6236,7 @@
           <p:cNvPr id="15" name="">
             <a:extLst xmlns:a="http://schemas.openxmlformats.org/drawingml/2006/main">
               <a:ext uri="{FF2B5EF4-FFF2-40B4-BE49-F238E27FC236}">
-                <a16:creationId xmlns:a16="http://schemas.microsoft.com/office/drawing/2014/main" id="{30CD4AC0-533C-42B9-B270-0A4160952DBC}"/>
+                <a16:creationId xmlns:a16="http://schemas.microsoft.com/office/drawing/2014/main" id="{33AE5BB7-A3D8-48A4-A575-58919B9A1ABE}"/>
               </a:ext>
             </a:extLst>
           </p:cNvPr>
@@ -6268,7 +6268,7 @@
           <p:cNvPr id="16" name="">
             <a:extLst xmlns:a="http://schemas.openxmlformats.org/drawingml/2006/main">
               <a:ext uri="{FF2B5EF4-FFF2-40B4-BE49-F238E27FC236}">
-                <a16:creationId xmlns:a16="http://schemas.microsoft.com/office/drawing/2014/main" id="{5F8380A3-5B87-49D5-B2EB-E1C656AFF4C5}"/>
+                <a16:creationId xmlns:a16="http://schemas.microsoft.com/office/drawing/2014/main" id="{BB8C7ED8-9940-42CD-960D-4FD5B54BCFAA}"/>
               </a:ext>
             </a:extLst>
           </p:cNvPr>
@@ -6325,7 +6325,7 @@
           <p:cNvPr id="17" name="">
             <a:extLst xmlns:a="http://schemas.openxmlformats.org/drawingml/2006/main">
               <a:ext uri="{FF2B5EF4-FFF2-40B4-BE49-F238E27FC236}">
-                <a16:creationId xmlns:a16="http://schemas.microsoft.com/office/drawing/2014/main" id="{257B054C-2EDB-405E-8E83-01FFEC3CBBF8}"/>
+                <a16:creationId xmlns:a16="http://schemas.microsoft.com/office/drawing/2014/main" id="{BA4370DE-2321-4B7E-95B7-8D0C52CC8B28}"/>
               </a:ext>
             </a:extLst>
           </p:cNvPr>
@@ -6382,7 +6382,7 @@
           <p:cNvPr id="18" name="">
             <a:extLst xmlns:a="http://schemas.openxmlformats.org/drawingml/2006/main">
               <a:ext uri="{FF2B5EF4-FFF2-40B4-BE49-F238E27FC236}">
-                <a16:creationId xmlns:a16="http://schemas.microsoft.com/office/drawing/2014/main" id="{B294BED7-7D31-4ADF-A15D-AF6DB7868EFA}"/>
+                <a16:creationId xmlns:a16="http://schemas.microsoft.com/office/drawing/2014/main" id="{A51A197A-0C1D-4474-8ED1-2CF5302017B6}"/>
               </a:ext>
             </a:extLst>
           </p:cNvPr>
@@ -6416,7 +6416,7 @@
           <p:cNvPr id="19" name="">
             <a:extLst xmlns:a="http://schemas.openxmlformats.org/drawingml/2006/main">
               <a:ext uri="{FF2B5EF4-FFF2-40B4-BE49-F238E27FC236}">
-                <a16:creationId xmlns:a16="http://schemas.microsoft.com/office/drawing/2014/main" id="{4AB537B5-25B4-4807-AD5D-D84717ED5253}"/>
+                <a16:creationId xmlns:a16="http://schemas.microsoft.com/office/drawing/2014/main" id="{02D5ABF9-84EE-4046-877A-C835A5E6E733}"/>
               </a:ext>
             </a:extLst>
           </p:cNvPr>
@@ -6448,7 +6448,7 @@
           <p:cNvPr id="20" name="">
             <a:extLst xmlns:a="http://schemas.openxmlformats.org/drawingml/2006/main">
               <a:ext uri="{FF2B5EF4-FFF2-40B4-BE49-F238E27FC236}">
-                <a16:creationId xmlns:a16="http://schemas.microsoft.com/office/drawing/2014/main" id="{7CCFDD32-85F3-4BEB-AD6E-A4F7944C5276}"/>
+                <a16:creationId xmlns:a16="http://schemas.microsoft.com/office/drawing/2014/main" id="{58762F99-EE3F-4336-8FC9-8807C11CBC57}"/>
               </a:ext>
             </a:extLst>
           </p:cNvPr>
@@ -6505,7 +6505,7 @@
           <p:cNvPr id="21" name="">
             <a:extLst xmlns:a="http://schemas.openxmlformats.org/drawingml/2006/main">
               <a:ext uri="{FF2B5EF4-FFF2-40B4-BE49-F238E27FC236}">
-                <a16:creationId xmlns:a16="http://schemas.microsoft.com/office/drawing/2014/main" id="{D58BE401-5DF6-4DF2-8858-27A2B20FAF4F}"/>
+                <a16:creationId xmlns:a16="http://schemas.microsoft.com/office/drawing/2014/main" id="{D0883421-96FB-4F21-A51C-A65E7DEAB56B}"/>
               </a:ext>
             </a:extLst>
           </p:cNvPr>
@@ -6562,7 +6562,7 @@
           <p:cNvPr id="22" name="">
             <a:extLst xmlns:a="http://schemas.openxmlformats.org/drawingml/2006/main">
               <a:ext uri="{FF2B5EF4-FFF2-40B4-BE49-F238E27FC236}">
-                <a16:creationId xmlns:a16="http://schemas.microsoft.com/office/drawing/2014/main" id="{E80F9BAA-0377-4A36-905F-C9C6B5ABB756}"/>
+                <a16:creationId xmlns:a16="http://schemas.microsoft.com/office/drawing/2014/main" id="{AD35AD36-35DC-4C68-A189-CA9ACD55F96D}"/>
               </a:ext>
             </a:extLst>
           </p:cNvPr>
@@ -6617,7 +6617,7 @@
     </p:spTree>
     <p:extLst>
       <p:ext uri="{BB962C8B-B14F-4D97-AF65-F5344CB8AC3E}">
-        <p14:creationId xmlns:p14="http://schemas.microsoft.com/office/powerpoint/2010/main" val="168471566"/>
+        <p14:creationId xmlns:p14="http://schemas.microsoft.com/office/powerpoint/2010/main" val="99606201"/>
       </p:ext>
     </p:extLst>
   </p:cSld>
@@ -6818,7 +6818,7 @@
           <p:cNvPr id="16" name="">
             <a:extLst xmlns:a="http://schemas.openxmlformats.org/drawingml/2006/main">
               <a:ext uri="{FF2B5EF4-FFF2-40B4-BE49-F238E27FC236}">
-                <a16:creationId xmlns:a16="http://schemas.microsoft.com/office/drawing/2014/main" id="{609E3AB3-1A0F-4531-A25A-905C131A5331}"/>
+                <a16:creationId xmlns:a16="http://schemas.microsoft.com/office/drawing/2014/main" id="{78DC22F1-B3BA-48AF-8246-34A153EC8842}"/>
               </a:ext>
             </a:extLst>
           </p:cNvPr>
@@ -6850,7 +6850,7 @@
           <p:cNvPr id="2" name="">
             <a:extLst xmlns:a="http://schemas.openxmlformats.org/drawingml/2006/main">
               <a:ext uri="{FF2B5EF4-FFF2-40B4-BE49-F238E27FC236}">
-                <a16:creationId xmlns:a16="http://schemas.microsoft.com/office/drawing/2014/main" id="{CBD30209-90F4-494D-BDDB-528C60E2F604}"/>
+                <a16:creationId xmlns:a16="http://schemas.microsoft.com/office/drawing/2014/main" id="{7068C051-9677-4EFD-8989-81964167D922}"/>
               </a:ext>
             </a:extLst>
           </p:cNvPr>
@@ -6907,7 +6907,7 @@
           <p:cNvPr id="3" name="">
             <a:extLst xmlns:a="http://schemas.openxmlformats.org/drawingml/2006/main">
               <a:ext uri="{FF2B5EF4-FFF2-40B4-BE49-F238E27FC236}">
-                <a16:creationId xmlns:a16="http://schemas.microsoft.com/office/drawing/2014/main" id="{60975C61-D6BE-4BDC-B42D-A4B13C2DE07C}"/>
+                <a16:creationId xmlns:a16="http://schemas.microsoft.com/office/drawing/2014/main" id="{682DD53A-3F24-4AFD-81A4-52BB60C04BD4}"/>
               </a:ext>
             </a:extLst>
           </p:cNvPr>
@@ -6939,7 +6939,7 @@
           <p:cNvPr id="4" name="">
             <a:extLst xmlns:a="http://schemas.openxmlformats.org/drawingml/2006/main">
               <a:ext uri="{FF2B5EF4-FFF2-40B4-BE49-F238E27FC236}">
-                <a16:creationId xmlns:a16="http://schemas.microsoft.com/office/drawing/2014/main" id="{F87B7401-849F-4EFD-8A3D-3B712CAF7DC5}"/>
+                <a16:creationId xmlns:a16="http://schemas.microsoft.com/office/drawing/2014/main" id="{5F624DA0-4CE0-4BF7-B58F-CF77D76FF0D1}"/>
               </a:ext>
             </a:extLst>
           </p:cNvPr>
@@ -6996,7 +6996,7 @@
           <p:cNvPr id="5" name="">
             <a:extLst xmlns:a="http://schemas.openxmlformats.org/drawingml/2006/main">
               <a:ext uri="{FF2B5EF4-FFF2-40B4-BE49-F238E27FC236}">
-                <a16:creationId xmlns:a16="http://schemas.microsoft.com/office/drawing/2014/main" id="{CFA59F84-6FBE-42C6-99C6-EFE9FAA96EC3}"/>
+                <a16:creationId xmlns:a16="http://schemas.microsoft.com/office/drawing/2014/main" id="{0FC4B7E7-C904-4857-813D-B25774F20636}"/>
               </a:ext>
             </a:extLst>
           </p:cNvPr>
@@ -7053,7 +7053,7 @@
           <p:cNvPr id="6" name="">
             <a:extLst xmlns:a="http://schemas.openxmlformats.org/drawingml/2006/main">
               <a:ext uri="{FF2B5EF4-FFF2-40B4-BE49-F238E27FC236}">
-                <a16:creationId xmlns:a16="http://schemas.microsoft.com/office/drawing/2014/main" id="{933AFBE2-96D6-4E5C-A94F-623BEE547078}"/>
+                <a16:creationId xmlns:a16="http://schemas.microsoft.com/office/drawing/2014/main" id="{6523E9D7-DBFC-49A0-A746-3A54055602A5}"/>
               </a:ext>
             </a:extLst>
           </p:cNvPr>
@@ -7110,7 +7110,7 @@
           <p:cNvPr id="7" name="">
             <a:extLst xmlns:a="http://schemas.openxmlformats.org/drawingml/2006/main">
               <a:ext uri="{FF2B5EF4-FFF2-40B4-BE49-F238E27FC236}">
-                <a16:creationId xmlns:a16="http://schemas.microsoft.com/office/drawing/2014/main" id="{43851BB7-0B2C-42E0-A9F8-37CDA7B7A987}"/>
+                <a16:creationId xmlns:a16="http://schemas.microsoft.com/office/drawing/2014/main" id="{61E9148B-CB13-4633-B722-EE86AFF243FB}"/>
               </a:ext>
             </a:extLst>
           </p:cNvPr>
@@ -7142,7 +7142,7 @@
           <p:cNvPr id="8" name="">
             <a:extLst xmlns:a="http://schemas.openxmlformats.org/drawingml/2006/main">
               <a:ext uri="{FF2B5EF4-FFF2-40B4-BE49-F238E27FC236}">
-                <a16:creationId xmlns:a16="http://schemas.microsoft.com/office/drawing/2014/main" id="{B3B3E30B-0519-4BA5-B479-F37398B304E1}"/>
+                <a16:creationId xmlns:a16="http://schemas.microsoft.com/office/drawing/2014/main" id="{A1778AFB-269C-4046-8F87-9F5AB8C7AA1A}"/>
               </a:ext>
             </a:extLst>
           </p:cNvPr>
@@ -7199,7 +7199,7 @@
           <p:cNvPr id="9" name="">
             <a:extLst xmlns:a="http://schemas.openxmlformats.org/drawingml/2006/main">
               <a:ext uri="{FF2B5EF4-FFF2-40B4-BE49-F238E27FC236}">
-                <a16:creationId xmlns:a16="http://schemas.microsoft.com/office/drawing/2014/main" id="{960D8D0F-C2B2-4C92-953B-57903969DA60}"/>
+                <a16:creationId xmlns:a16="http://schemas.microsoft.com/office/drawing/2014/main" id="{1D02A435-E010-4694-A105-B1B3151BD796}"/>
               </a:ext>
             </a:extLst>
           </p:cNvPr>
@@ -7256,7 +7256,7 @@
           <p:cNvPr id="10" name="">
             <a:extLst xmlns:a="http://schemas.openxmlformats.org/drawingml/2006/main">
               <a:ext uri="{FF2B5EF4-FFF2-40B4-BE49-F238E27FC236}">
-                <a16:creationId xmlns:a16="http://schemas.microsoft.com/office/drawing/2014/main" id="{403F3F31-F06E-40F3-8054-EA8EFF857A4E}"/>
+                <a16:creationId xmlns:a16="http://schemas.microsoft.com/office/drawing/2014/main" id="{9B4B16F4-DE88-403C-A67F-8F098EFF7D26}"/>
               </a:ext>
             </a:extLst>
           </p:cNvPr>
@@ -7313,7 +7313,7 @@
           <p:cNvPr id="11" name="">
             <a:extLst xmlns:a="http://schemas.openxmlformats.org/drawingml/2006/main">
               <a:ext uri="{FF2B5EF4-FFF2-40B4-BE49-F238E27FC236}">
-                <a16:creationId xmlns:a16="http://schemas.microsoft.com/office/drawing/2014/main" id="{25D67BFA-7611-41AC-A4F0-06E9FD4E886F}"/>
+                <a16:creationId xmlns:a16="http://schemas.microsoft.com/office/drawing/2014/main" id="{B2C4C48E-BD91-49D2-8E74-9776F9294062}"/>
               </a:ext>
             </a:extLst>
           </p:cNvPr>
@@ -7345,7 +7345,7 @@
           <p:cNvPr id="12" name="">
             <a:extLst xmlns:a="http://schemas.openxmlformats.org/drawingml/2006/main">
               <a:ext uri="{FF2B5EF4-FFF2-40B4-BE49-F238E27FC236}">
-                <a16:creationId xmlns:a16="http://schemas.microsoft.com/office/drawing/2014/main" id="{0D68D6B5-0550-4DE1-B834-73C63C73635B}"/>
+                <a16:creationId xmlns:a16="http://schemas.microsoft.com/office/drawing/2014/main" id="{3685A182-2653-4743-A867-AFEA14D7A59E}"/>
               </a:ext>
             </a:extLst>
           </p:cNvPr>
@@ -7402,7 +7402,7 @@
           <p:cNvPr id="13" name="">
             <a:extLst xmlns:a="http://schemas.openxmlformats.org/drawingml/2006/main">
               <a:ext uri="{FF2B5EF4-FFF2-40B4-BE49-F238E27FC236}">
-                <a16:creationId xmlns:a16="http://schemas.microsoft.com/office/drawing/2014/main" id="{7564F61B-E281-41F8-B258-EAF847966604}"/>
+                <a16:creationId xmlns:a16="http://schemas.microsoft.com/office/drawing/2014/main" id="{74E89228-9AC9-485A-82A5-B82B93E88295}"/>
               </a:ext>
             </a:extLst>
           </p:cNvPr>
@@ -7459,7 +7459,7 @@
           <p:cNvPr id="14" name="">
             <a:extLst xmlns:a="http://schemas.openxmlformats.org/drawingml/2006/main">
               <a:ext uri="{FF2B5EF4-FFF2-40B4-BE49-F238E27FC236}">
-                <a16:creationId xmlns:a16="http://schemas.microsoft.com/office/drawing/2014/main" id="{214FA02C-58EE-4590-998E-26945DF48137}"/>
+                <a16:creationId xmlns:a16="http://schemas.microsoft.com/office/drawing/2014/main" id="{5A9976B9-E1F1-4673-BCEA-3E4E60C92CCA}"/>
               </a:ext>
             </a:extLst>
           </p:cNvPr>
@@ -7516,7 +7516,7 @@
           <p:cNvPr id="15" name="">
             <a:extLst xmlns:a="http://schemas.openxmlformats.org/drawingml/2006/main">
               <a:ext uri="{FF2B5EF4-FFF2-40B4-BE49-F238E27FC236}">
-                <a16:creationId xmlns:a16="http://schemas.microsoft.com/office/drawing/2014/main" id="{85A651BA-59E9-4AD2-97CE-75960121A6AC}"/>
+                <a16:creationId xmlns:a16="http://schemas.microsoft.com/office/drawing/2014/main" id="{77A22210-44D4-42B1-BEDA-E01960D69E0D}"/>
               </a:ext>
             </a:extLst>
           </p:cNvPr>
@@ -7571,7 +7571,7 @@
     </p:spTree>
     <p:extLst>
       <p:ext uri="{BB962C8B-B14F-4D97-AF65-F5344CB8AC3E}">
-        <p14:creationId xmlns:p14="http://schemas.microsoft.com/office/powerpoint/2010/main" val="615274217"/>
+        <p14:creationId xmlns:p14="http://schemas.microsoft.com/office/powerpoint/2010/main" val="1821224787"/>
       </p:ext>
     </p:extLst>
   </p:cSld>
@@ -7769,10 +7769,10 @@
       </p:grpSpPr>
       <p:sp>
         <p:nvSpPr>
-          <p:cNvPr id="23" name="">
-            <a:extLst xmlns:a="http://schemas.openxmlformats.org/drawingml/2006/main">
-              <a:ext uri="{FF2B5EF4-FFF2-40B4-BE49-F238E27FC236}">
-                <a16:creationId xmlns:a16="http://schemas.microsoft.com/office/drawing/2014/main" id="{71522F00-EC24-4D4B-8E4C-024BF724EB90}"/>
+          <p:cNvPr id="26" name="">
+            <a:extLst xmlns:a="http://schemas.openxmlformats.org/drawingml/2006/main">
+              <a:ext uri="{FF2B5EF4-FFF2-40B4-BE49-F238E27FC236}">
+                <a16:creationId xmlns:a16="http://schemas.microsoft.com/office/drawing/2014/main" id="{DA6CC59C-5B8C-4F6E-953B-DCF9CFC217BE}"/>
               </a:ext>
             </a:extLst>
           </p:cNvPr>
@@ -7804,7 +7804,7 @@
           <p:cNvPr id="2" name="">
             <a:extLst xmlns:a="http://schemas.openxmlformats.org/drawingml/2006/main">
               <a:ext uri="{FF2B5EF4-FFF2-40B4-BE49-F238E27FC236}">
-                <a16:creationId xmlns:a16="http://schemas.microsoft.com/office/drawing/2014/main" id="{B4E92947-BF2E-496A-8236-D1EE81DF2F72}"/>
+                <a16:creationId xmlns:a16="http://schemas.microsoft.com/office/drawing/2014/main" id="{DCDE00CD-BB85-4865-8995-C2305A7688EB}"/>
               </a:ext>
             </a:extLst>
           </p:cNvPr>
@@ -7861,7 +7861,7 @@
           <p:cNvPr id="3" name="">
             <a:extLst xmlns:a="http://schemas.openxmlformats.org/drawingml/2006/main">
               <a:ext uri="{FF2B5EF4-FFF2-40B4-BE49-F238E27FC236}">
-                <a16:creationId xmlns:a16="http://schemas.microsoft.com/office/drawing/2014/main" id="{D579B586-3DAE-4152-947F-C893004946BF}"/>
+                <a16:creationId xmlns:a16="http://schemas.microsoft.com/office/drawing/2014/main" id="{EFBFA9F8-8496-4C9B-98E2-C76011CA6244}"/>
               </a:ext>
             </a:extLst>
           </p:cNvPr>
@@ -7893,7 +7893,7 @@
           <p:cNvPr id="4" name="">
             <a:extLst xmlns:a="http://schemas.openxmlformats.org/drawingml/2006/main">
               <a:ext uri="{FF2B5EF4-FFF2-40B4-BE49-F238E27FC236}">
-                <a16:creationId xmlns:a16="http://schemas.microsoft.com/office/drawing/2014/main" id="{526649BC-F3C5-4524-91CA-E6BAA9DA7363}"/>
+                <a16:creationId xmlns:a16="http://schemas.microsoft.com/office/drawing/2014/main" id="{C2802F82-9E27-45FE-9852-33E9D5F36CEB}"/>
               </a:ext>
             </a:extLst>
           </p:cNvPr>
@@ -7950,7 +7950,7 @@
           <p:cNvPr id="5" name="">
             <a:extLst xmlns:a="http://schemas.openxmlformats.org/drawingml/2006/main">
               <a:ext uri="{FF2B5EF4-FFF2-40B4-BE49-F238E27FC236}">
-                <a16:creationId xmlns:a16="http://schemas.microsoft.com/office/drawing/2014/main" id="{986C42BB-3692-41DC-A354-737B22C12C24}"/>
+                <a16:creationId xmlns:a16="http://schemas.microsoft.com/office/drawing/2014/main" id="{F17059A9-AC7B-44FF-95A5-3417CD2E8B7C}"/>
               </a:ext>
             </a:extLst>
           </p:cNvPr>
@@ -8007,7 +8007,7 @@
           <p:cNvPr id="6" name="">
             <a:extLst xmlns:a="http://schemas.openxmlformats.org/drawingml/2006/main">
               <a:ext uri="{FF2B5EF4-FFF2-40B4-BE49-F238E27FC236}">
-                <a16:creationId xmlns:a16="http://schemas.microsoft.com/office/drawing/2014/main" id="{7C271A56-3160-488C-ABEF-1852E16678A1}"/>
+                <a16:creationId xmlns:a16="http://schemas.microsoft.com/office/drawing/2014/main" id="{AD753090-71C6-4CBF-BBAB-C5CCAD1DEB1C}"/>
               </a:ext>
             </a:extLst>
           </p:cNvPr>
@@ -8064,7 +8064,7 @@
           <p:cNvPr id="7" name="">
             <a:extLst xmlns:a="http://schemas.openxmlformats.org/drawingml/2006/main">
               <a:ext uri="{FF2B5EF4-FFF2-40B4-BE49-F238E27FC236}">
-                <a16:creationId xmlns:a16="http://schemas.microsoft.com/office/drawing/2014/main" id="{3FEEEEEB-C8A6-442D-A6BF-47B1892C0BDE}"/>
+                <a16:creationId xmlns:a16="http://schemas.microsoft.com/office/drawing/2014/main" id="{216567B8-E57B-415D-BB2F-24F69676205D}"/>
               </a:ext>
             </a:extLst>
           </p:cNvPr>
@@ -8096,7 +8096,7 @@
           <p:cNvPr id="8" name="">
             <a:extLst xmlns:a="http://schemas.openxmlformats.org/drawingml/2006/main">
               <a:ext uri="{FF2B5EF4-FFF2-40B4-BE49-F238E27FC236}">
-                <a16:creationId xmlns:a16="http://schemas.microsoft.com/office/drawing/2014/main" id="{60D28E59-A85B-49F3-954C-7DDCAD282067}"/>
+                <a16:creationId xmlns:a16="http://schemas.microsoft.com/office/drawing/2014/main" id="{A6D30E51-4096-439B-89BC-9D552888DF5D}"/>
               </a:ext>
             </a:extLst>
           </p:cNvPr>
@@ -8153,7 +8153,7 @@
           <p:cNvPr id="9" name="">
             <a:extLst xmlns:a="http://schemas.openxmlformats.org/drawingml/2006/main">
               <a:ext uri="{FF2B5EF4-FFF2-40B4-BE49-F238E27FC236}">
-                <a16:creationId xmlns:a16="http://schemas.microsoft.com/office/drawing/2014/main" id="{A3A5DCB6-4098-419B-BB5D-1F4C3E14D830}"/>
+                <a16:creationId xmlns:a16="http://schemas.microsoft.com/office/drawing/2014/main" id="{06098DB6-0EA1-4EB8-9775-44CC59BBD693}"/>
               </a:ext>
             </a:extLst>
           </p:cNvPr>
@@ -8210,19 +8210,19 @@
           <p:cNvPr id="10" name="">
             <a:extLst xmlns:a="http://schemas.openxmlformats.org/drawingml/2006/main">
               <a:ext uri="{FF2B5EF4-FFF2-40B4-BE49-F238E27FC236}">
-                <a16:creationId xmlns:a16="http://schemas.microsoft.com/office/drawing/2014/main" id="{4705DD56-41FD-44B8-BF92-C1076866DD5F}"/>
-              </a:ext>
-            </a:extLst>
-          </p:cNvPr>
-          <p:cNvSpPr>
-            <a:spLocks xmlns:a="http://schemas.openxmlformats.org/drawingml/2006/main" noGrp="1"/>
-          </p:cNvSpPr>
-          <p:nvPr/>
-        </p:nvSpPr>
-        <p:spPr>
-          <a:xfrm xmlns:a="http://schemas.openxmlformats.org/drawingml/2006/main">
-            <a:off x="914400" y="1257300"/>
-            <a:ext cx="10363200" cy="781050"/>
+                <a16:creationId xmlns:a16="http://schemas.microsoft.com/office/drawing/2014/main" id="{54B354D0-548F-41A0-83FB-299E47C2A41C}"/>
+              </a:ext>
+            </a:extLst>
+          </p:cNvPr>
+          <p:cNvSpPr>
+            <a:spLocks xmlns:a="http://schemas.openxmlformats.org/drawingml/2006/main" noGrp="1"/>
+          </p:cNvSpPr>
+          <p:nvPr/>
+        </p:nvSpPr>
+        <p:spPr>
+          <a:xfrm xmlns:a="http://schemas.openxmlformats.org/drawingml/2006/main">
+            <a:off x="857250" y="1219200"/>
+            <a:ext cx="10477500" cy="742950"/>
           </a:xfrm>
           <a:prstGeom xmlns:a="http://schemas.openxmlformats.org/drawingml/2006/main" prst="rect">
             <a:avLst/>
@@ -8239,7 +8239,7 @@
           <a:lstStyle xmlns:a="http://schemas.openxmlformats.org/drawingml/2006/main"/>
           <a:p xmlns:a="http://schemas.openxmlformats.org/drawingml/2006/main">
             <a:pPr algn="ctr">
-              <a:defRPr sz="2175" b="1">
+              <a:defRPr sz="2100" b="1">
                 <a:solidFill>
                   <a:srgbClr val="17253A"/>
                 </a:solidFill>
@@ -8249,7 +8249,7 @@
               </a:defRPr>
             </a:pPr>
             <a:r>
-              <a:rPr sz="2175" b="1">
+              <a:rPr sz="2100" b="1">
                 <a:solidFill>
                   <a:srgbClr val="17253A"/>
                 </a:solidFill>
@@ -8267,28 +8267,30 @@
           <p:cNvPr id="11" name="">
             <a:extLst xmlns:a="http://schemas.openxmlformats.org/drawingml/2006/main">
               <a:ext uri="{FF2B5EF4-FFF2-40B4-BE49-F238E27FC236}">
-                <a16:creationId xmlns:a16="http://schemas.microsoft.com/office/drawing/2014/main" id="{59378D34-0A4E-4352-A8FB-6404BBF9623C}"/>
-              </a:ext>
-            </a:extLst>
-          </p:cNvPr>
-          <p:cNvSpPr>
-            <a:spLocks xmlns:a="http://schemas.openxmlformats.org/drawingml/2006/main" noGrp="1"/>
-          </p:cNvSpPr>
-          <p:nvPr/>
-        </p:nvSpPr>
-        <p:spPr>
-          <a:xfrm xmlns:a="http://schemas.openxmlformats.org/drawingml/2006/main">
-            <a:off x="1000125" y="2247900"/>
-            <a:ext cx="476250" cy="476250"/>
-          </a:xfrm>
-          <a:prstGeom xmlns:a="http://schemas.openxmlformats.org/drawingml/2006/main" prst="ellipse">
+                <a16:creationId xmlns:a16="http://schemas.microsoft.com/office/drawing/2014/main" id="{76E43A89-3DF7-44F7-9E52-6A974D21B551}"/>
+              </a:ext>
+            </a:extLst>
+          </p:cNvPr>
+          <p:cNvSpPr>
+            <a:spLocks xmlns:a="http://schemas.openxmlformats.org/drawingml/2006/main" noGrp="1"/>
+          </p:cNvSpPr>
+          <p:nvPr/>
+        </p:nvSpPr>
+        <p:spPr>
+          <a:xfrm xmlns:a="http://schemas.openxmlformats.org/drawingml/2006/main">
+            <a:off x="971550" y="2124075"/>
+            <a:ext cx="38100" cy="3524250"/>
+          </a:xfrm>
+          <a:prstGeom xmlns:a="http://schemas.openxmlformats.org/drawingml/2006/main" prst="rect">
             <a:avLst/>
           </a:prstGeom>
           <a:solidFill xmlns:a="http://schemas.openxmlformats.org/drawingml/2006/main">
-            <a:srgbClr val="18324A"/>
+            <a:srgbClr val="2C6E73"/>
           </a:solidFill>
           <a:ln xmlns:a="http://schemas.openxmlformats.org/drawingml/2006/main" w="0">
-            <a:noFill/>
+            <a:solidFill>
+              <a:srgbClr val="2C6E73"/>
+            </a:solidFill>
           </a:ln>
         </p:spPr>
       </p:sp>
@@ -8297,19 +8299,19 @@
           <p:cNvPr id="12" name="">
             <a:extLst xmlns:a="http://schemas.openxmlformats.org/drawingml/2006/main">
               <a:ext uri="{FF2B5EF4-FFF2-40B4-BE49-F238E27FC236}">
-                <a16:creationId xmlns:a16="http://schemas.microsoft.com/office/drawing/2014/main" id="{7BDB29C0-19A3-4A4A-931D-8EED87A16869}"/>
-              </a:ext>
-            </a:extLst>
-          </p:cNvPr>
-          <p:cNvSpPr>
-            <a:spLocks xmlns:a="http://schemas.openxmlformats.org/drawingml/2006/main" noGrp="1"/>
-          </p:cNvSpPr>
-          <p:nvPr/>
-        </p:nvSpPr>
-        <p:spPr>
-          <a:xfrm xmlns:a="http://schemas.openxmlformats.org/drawingml/2006/main">
-            <a:off x="1000125" y="2276475"/>
-            <a:ext cx="476250" cy="419100"/>
+                <a16:creationId xmlns:a16="http://schemas.microsoft.com/office/drawing/2014/main" id="{02B0DB9B-4D1B-4352-BCB3-E08B82C105B7}"/>
+              </a:ext>
+            </a:extLst>
+          </p:cNvPr>
+          <p:cNvSpPr>
+            <a:spLocks xmlns:a="http://schemas.openxmlformats.org/drawingml/2006/main" noGrp="1"/>
+          </p:cNvSpPr>
+          <p:nvPr/>
+        </p:nvSpPr>
+        <p:spPr>
+          <a:xfrm xmlns:a="http://schemas.openxmlformats.org/drawingml/2006/main">
+            <a:off x="1162050" y="2200275"/>
+            <a:ext cx="400050" cy="400050"/>
           </a:xfrm>
           <a:prstGeom xmlns:a="http://schemas.openxmlformats.org/drawingml/2006/main" prst="rect">
             <a:avLst/>
@@ -8326,9 +8328,9 @@
           <a:lstStyle xmlns:a="http://schemas.openxmlformats.org/drawingml/2006/main"/>
           <a:p xmlns:a="http://schemas.openxmlformats.org/drawingml/2006/main">
             <a:pPr algn="ctr">
-              <a:defRPr sz="1350" b="1">
-                <a:solidFill>
-                  <a:srgbClr val="FFFFFF"/>
+              <a:defRPr sz="1125" b="1">
+                <a:solidFill>
+                  <a:srgbClr val="2C6E73"/>
                 </a:solidFill>
                 <a:latin typeface="Arial"/>
                 <a:ea typeface="Arial"/>
@@ -8336,9 +8338,9 @@
               </a:defRPr>
             </a:pPr>
             <a:r>
-              <a:rPr sz="1350" b="1">
-                <a:solidFill>
-                  <a:srgbClr val="FFFFFF"/>
+              <a:rPr sz="1125" b="1">
+                <a:solidFill>
+                  <a:srgbClr val="2C6E73"/>
                 </a:solidFill>
                 <a:latin typeface="Arial"/>
                 <a:ea typeface="Arial"/>
@@ -8354,19 +8356,19 @@
           <p:cNvPr id="13" name="">
             <a:extLst xmlns:a="http://schemas.openxmlformats.org/drawingml/2006/main">
               <a:ext uri="{FF2B5EF4-FFF2-40B4-BE49-F238E27FC236}">
-                <a16:creationId xmlns:a16="http://schemas.microsoft.com/office/drawing/2014/main" id="{F1FEF9C7-295A-4D2C-848A-88675B264A9F}"/>
-              </a:ext>
-            </a:extLst>
-          </p:cNvPr>
-          <p:cNvSpPr>
-            <a:spLocks xmlns:a="http://schemas.openxmlformats.org/drawingml/2006/main" noGrp="1"/>
-          </p:cNvSpPr>
-          <p:nvPr/>
-        </p:nvSpPr>
-        <p:spPr>
-          <a:xfrm xmlns:a="http://schemas.openxmlformats.org/drawingml/2006/main">
-            <a:off x="1714500" y="2181225"/>
-            <a:ext cx="9429750" cy="609600"/>
+                <a16:creationId xmlns:a16="http://schemas.microsoft.com/office/drawing/2014/main" id="{84AC7844-8115-447A-988C-7F42B203D01B}"/>
+              </a:ext>
+            </a:extLst>
+          </p:cNvPr>
+          <p:cNvSpPr>
+            <a:spLocks xmlns:a="http://schemas.openxmlformats.org/drawingml/2006/main" noGrp="1"/>
+          </p:cNvSpPr>
+          <p:nvPr/>
+        </p:nvSpPr>
+        <p:spPr>
+          <a:xfrm xmlns:a="http://schemas.openxmlformats.org/drawingml/2006/main">
+            <a:off x="1714500" y="2114550"/>
+            <a:ext cx="9525000" cy="638175"/>
           </a:xfrm>
           <a:prstGeom xmlns:a="http://schemas.openxmlformats.org/drawingml/2006/main" prst="rect">
             <a:avLst/>
@@ -8383,7 +8385,7 @@
           <a:lstStyle xmlns:a="http://schemas.openxmlformats.org/drawingml/2006/main"/>
           <a:p xmlns:a="http://schemas.openxmlformats.org/drawingml/2006/main">
             <a:pPr algn="l">
-              <a:defRPr sz="1500" b="0">
+              <a:defRPr sz="1575" b="0">
                 <a:solidFill>
                   <a:srgbClr val="17253A"/>
                 </a:solidFill>
@@ -8393,7 +8395,7 @@
               </a:defRPr>
             </a:pPr>
             <a:r>
-              <a:rPr sz="1500" b="0">
+              <a:rPr sz="1575" b="0">
                 <a:solidFill>
                   <a:srgbClr val="17253A"/>
                 </a:solidFill>
@@ -8401,7 +8403,7 @@
                 <a:ea typeface="Arial"/>
                 <a:cs typeface="Arial"/>
               </a:rPr>
-              <a:t>Identify the structure: Notice the number structure before choosing a method.</a:t>
+              <a:t>6,782 × 49</a:t>
             </a:r>
           </a:p>
         </p:txBody>
@@ -8411,28 +8413,30 @@
           <p:cNvPr id="14" name="">
             <a:extLst xmlns:a="http://schemas.openxmlformats.org/drawingml/2006/main">
               <a:ext uri="{FF2B5EF4-FFF2-40B4-BE49-F238E27FC236}">
-                <a16:creationId xmlns:a16="http://schemas.microsoft.com/office/drawing/2014/main" id="{C42EB794-4715-4747-80F3-60F59F0E248F}"/>
-              </a:ext>
-            </a:extLst>
-          </p:cNvPr>
-          <p:cNvSpPr>
-            <a:spLocks xmlns:a="http://schemas.openxmlformats.org/drawingml/2006/main" noGrp="1"/>
-          </p:cNvSpPr>
-          <p:nvPr/>
-        </p:nvSpPr>
-        <p:spPr>
-          <a:xfrm xmlns:a="http://schemas.openxmlformats.org/drawingml/2006/main">
-            <a:off x="1000125" y="2990850"/>
-            <a:ext cx="476250" cy="476250"/>
-          </a:xfrm>
-          <a:prstGeom xmlns:a="http://schemas.openxmlformats.org/drawingml/2006/main" prst="ellipse">
+                <a16:creationId xmlns:a16="http://schemas.microsoft.com/office/drawing/2014/main" id="{223EC10E-A3AC-4D2E-988D-CF34D17357FA}"/>
+              </a:ext>
+            </a:extLst>
+          </p:cNvPr>
+          <p:cNvSpPr>
+            <a:spLocks xmlns:a="http://schemas.openxmlformats.org/drawingml/2006/main" noGrp="1"/>
+          </p:cNvSpPr>
+          <p:nvPr/>
+        </p:nvSpPr>
+        <p:spPr>
+          <a:xfrm xmlns:a="http://schemas.openxmlformats.org/drawingml/2006/main">
+            <a:off x="1714500" y="2771775"/>
+            <a:ext cx="9334500" cy="9525"/>
+          </a:xfrm>
+          <a:prstGeom xmlns:a="http://schemas.openxmlformats.org/drawingml/2006/main" prst="rect">
             <a:avLst/>
           </a:prstGeom>
           <a:solidFill xmlns:a="http://schemas.openxmlformats.org/drawingml/2006/main">
-            <a:srgbClr val="2C6E73"/>
+            <a:srgbClr val="D9E0E6"/>
           </a:solidFill>
           <a:ln xmlns:a="http://schemas.openxmlformats.org/drawingml/2006/main" w="0">
-            <a:noFill/>
+            <a:solidFill>
+              <a:srgbClr val="D9E0E6"/>
+            </a:solidFill>
           </a:ln>
         </p:spPr>
       </p:sp>
@@ -8441,19 +8445,19 @@
           <p:cNvPr id="15" name="">
             <a:extLst xmlns:a="http://schemas.openxmlformats.org/drawingml/2006/main">
               <a:ext uri="{FF2B5EF4-FFF2-40B4-BE49-F238E27FC236}">
-                <a16:creationId xmlns:a16="http://schemas.microsoft.com/office/drawing/2014/main" id="{E7D0BB34-BD72-491B-B904-9B0D6957CEC1}"/>
-              </a:ext>
-            </a:extLst>
-          </p:cNvPr>
-          <p:cNvSpPr>
-            <a:spLocks xmlns:a="http://schemas.openxmlformats.org/drawingml/2006/main" noGrp="1"/>
-          </p:cNvSpPr>
-          <p:nvPr/>
-        </p:nvSpPr>
-        <p:spPr>
-          <a:xfrm xmlns:a="http://schemas.openxmlformats.org/drawingml/2006/main">
-            <a:off x="1000125" y="3019425"/>
-            <a:ext cx="476250" cy="419100"/>
+                <a16:creationId xmlns:a16="http://schemas.microsoft.com/office/drawing/2014/main" id="{26BA8C04-4FC6-4C80-86FA-6CA0E01597E0}"/>
+              </a:ext>
+            </a:extLst>
+          </p:cNvPr>
+          <p:cNvSpPr>
+            <a:spLocks xmlns:a="http://schemas.openxmlformats.org/drawingml/2006/main" noGrp="1"/>
+          </p:cNvSpPr>
+          <p:nvPr/>
+        </p:nvSpPr>
+        <p:spPr>
+          <a:xfrm xmlns:a="http://schemas.openxmlformats.org/drawingml/2006/main">
+            <a:off x="1162050" y="2905125"/>
+            <a:ext cx="400050" cy="400050"/>
           </a:xfrm>
           <a:prstGeom xmlns:a="http://schemas.openxmlformats.org/drawingml/2006/main" prst="rect">
             <a:avLst/>
@@ -8470,9 +8474,9 @@
           <a:lstStyle xmlns:a="http://schemas.openxmlformats.org/drawingml/2006/main"/>
           <a:p xmlns:a="http://schemas.openxmlformats.org/drawingml/2006/main">
             <a:pPr algn="ctr">
-              <a:defRPr sz="1350" b="1">
-                <a:solidFill>
-                  <a:srgbClr val="FFFFFF"/>
+              <a:defRPr sz="1125" b="1">
+                <a:solidFill>
+                  <a:srgbClr val="2C6E73"/>
                 </a:solidFill>
                 <a:latin typeface="Arial"/>
                 <a:ea typeface="Arial"/>
@@ -8480,9 +8484,9 @@
               </a:defRPr>
             </a:pPr>
             <a:r>
-              <a:rPr sz="1350" b="1">
-                <a:solidFill>
-                  <a:srgbClr val="FFFFFF"/>
+              <a:rPr sz="1125" b="1">
+                <a:solidFill>
+                  <a:srgbClr val="2C6E73"/>
                 </a:solidFill>
                 <a:latin typeface="Arial"/>
                 <a:ea typeface="Arial"/>
@@ -8498,19 +8502,19 @@
           <p:cNvPr id="16" name="">
             <a:extLst xmlns:a="http://schemas.openxmlformats.org/drawingml/2006/main">
               <a:ext uri="{FF2B5EF4-FFF2-40B4-BE49-F238E27FC236}">
-                <a16:creationId xmlns:a16="http://schemas.microsoft.com/office/drawing/2014/main" id="{C278D24F-3DCD-4EA3-BDAC-103A3D3D74E2}"/>
-              </a:ext>
-            </a:extLst>
-          </p:cNvPr>
-          <p:cNvSpPr>
-            <a:spLocks xmlns:a="http://schemas.openxmlformats.org/drawingml/2006/main" noGrp="1"/>
-          </p:cNvSpPr>
-          <p:nvPr/>
-        </p:nvSpPr>
-        <p:spPr>
-          <a:xfrm xmlns:a="http://schemas.openxmlformats.org/drawingml/2006/main">
-            <a:off x="1714500" y="2924175"/>
-            <a:ext cx="9429750" cy="609600"/>
+                <a16:creationId xmlns:a16="http://schemas.microsoft.com/office/drawing/2014/main" id="{B6471514-4C4E-4959-A246-6A10B4DCAA78}"/>
+              </a:ext>
+            </a:extLst>
+          </p:cNvPr>
+          <p:cNvSpPr>
+            <a:spLocks xmlns:a="http://schemas.openxmlformats.org/drawingml/2006/main" noGrp="1"/>
+          </p:cNvSpPr>
+          <p:nvPr/>
+        </p:nvSpPr>
+        <p:spPr>
+          <a:xfrm xmlns:a="http://schemas.openxmlformats.org/drawingml/2006/main">
+            <a:off x="1714500" y="2819400"/>
+            <a:ext cx="9525000" cy="638175"/>
           </a:xfrm>
           <a:prstGeom xmlns:a="http://schemas.openxmlformats.org/drawingml/2006/main" prst="rect">
             <a:avLst/>
@@ -8527,7 +8531,7 @@
           <a:lstStyle xmlns:a="http://schemas.openxmlformats.org/drawingml/2006/main"/>
           <a:p xmlns:a="http://schemas.openxmlformats.org/drawingml/2006/main">
             <a:pPr algn="l">
-              <a:defRPr sz="1500" b="0">
+              <a:defRPr sz="1575" b="0">
                 <a:solidFill>
                   <a:srgbClr val="17253A"/>
                 </a:solidFill>
@@ -8537,7 +8541,7 @@
               </a:defRPr>
             </a:pPr>
             <a:r>
-              <a:rPr sz="1500" b="0">
+              <a:rPr sz="1575" b="0">
                 <a:solidFill>
                   <a:srgbClr val="17253A"/>
                 </a:solidFill>
@@ -8545,7 +8549,7 @@
                 <a:ea typeface="Arial"/>
                 <a:cs typeface="Arial"/>
               </a:rPr>
-              <a:t>Set up the method: Use a known fact, partition or compensation to calculate efficiently.</a:t>
+              <a:t>6,782 → 6,800</a:t>
             </a:r>
           </a:p>
         </p:txBody>
@@ -8555,28 +8559,30 @@
           <p:cNvPr id="17" name="">
             <a:extLst xmlns:a="http://schemas.openxmlformats.org/drawingml/2006/main">
               <a:ext uri="{FF2B5EF4-FFF2-40B4-BE49-F238E27FC236}">
-                <a16:creationId xmlns:a16="http://schemas.microsoft.com/office/drawing/2014/main" id="{7FF9367D-6839-4C0B-A9AF-576E96BCDB72}"/>
-              </a:ext>
-            </a:extLst>
-          </p:cNvPr>
-          <p:cNvSpPr>
-            <a:spLocks xmlns:a="http://schemas.openxmlformats.org/drawingml/2006/main" noGrp="1"/>
-          </p:cNvSpPr>
-          <p:nvPr/>
-        </p:nvSpPr>
-        <p:spPr>
-          <a:xfrm xmlns:a="http://schemas.openxmlformats.org/drawingml/2006/main">
-            <a:off x="1000125" y="3733800"/>
-            <a:ext cx="476250" cy="476250"/>
-          </a:xfrm>
-          <a:prstGeom xmlns:a="http://schemas.openxmlformats.org/drawingml/2006/main" prst="ellipse">
+                <a16:creationId xmlns:a16="http://schemas.microsoft.com/office/drawing/2014/main" id="{455CC501-DC15-4608-8A94-8A6FD8FA6263}"/>
+              </a:ext>
+            </a:extLst>
+          </p:cNvPr>
+          <p:cNvSpPr>
+            <a:spLocks xmlns:a="http://schemas.openxmlformats.org/drawingml/2006/main" noGrp="1"/>
+          </p:cNvSpPr>
+          <p:nvPr/>
+        </p:nvSpPr>
+        <p:spPr>
+          <a:xfrm xmlns:a="http://schemas.openxmlformats.org/drawingml/2006/main">
+            <a:off x="1714500" y="3476625"/>
+            <a:ext cx="9334500" cy="9525"/>
+          </a:xfrm>
+          <a:prstGeom xmlns:a="http://schemas.openxmlformats.org/drawingml/2006/main" prst="rect">
             <a:avLst/>
           </a:prstGeom>
           <a:solidFill xmlns:a="http://schemas.openxmlformats.org/drawingml/2006/main">
-            <a:srgbClr val="2C6E73"/>
+            <a:srgbClr val="D9E0E6"/>
           </a:solidFill>
           <a:ln xmlns:a="http://schemas.openxmlformats.org/drawingml/2006/main" w="0">
-            <a:noFill/>
+            <a:solidFill>
+              <a:srgbClr val="D9E0E6"/>
+            </a:solidFill>
           </a:ln>
         </p:spPr>
       </p:sp>
@@ -8585,19 +8591,19 @@
           <p:cNvPr id="18" name="">
             <a:extLst xmlns:a="http://schemas.openxmlformats.org/drawingml/2006/main">
               <a:ext uri="{FF2B5EF4-FFF2-40B4-BE49-F238E27FC236}">
-                <a16:creationId xmlns:a16="http://schemas.microsoft.com/office/drawing/2014/main" id="{4F8ADF15-CF6C-4824-8D89-5AB40492F992}"/>
-              </a:ext>
-            </a:extLst>
-          </p:cNvPr>
-          <p:cNvSpPr>
-            <a:spLocks xmlns:a="http://schemas.openxmlformats.org/drawingml/2006/main" noGrp="1"/>
-          </p:cNvSpPr>
-          <p:nvPr/>
-        </p:nvSpPr>
-        <p:spPr>
-          <a:xfrm xmlns:a="http://schemas.openxmlformats.org/drawingml/2006/main">
-            <a:off x="1000125" y="3762375"/>
-            <a:ext cx="476250" cy="419100"/>
+                <a16:creationId xmlns:a16="http://schemas.microsoft.com/office/drawing/2014/main" id="{88A14C18-7971-4018-B18C-B7263F29B7BF}"/>
+              </a:ext>
+            </a:extLst>
+          </p:cNvPr>
+          <p:cNvSpPr>
+            <a:spLocks xmlns:a="http://schemas.openxmlformats.org/drawingml/2006/main" noGrp="1"/>
+          </p:cNvSpPr>
+          <p:nvPr/>
+        </p:nvSpPr>
+        <p:spPr>
+          <a:xfrm xmlns:a="http://schemas.openxmlformats.org/drawingml/2006/main">
+            <a:off x="1162050" y="3609975"/>
+            <a:ext cx="400050" cy="400050"/>
           </a:xfrm>
           <a:prstGeom xmlns:a="http://schemas.openxmlformats.org/drawingml/2006/main" prst="rect">
             <a:avLst/>
@@ -8614,9 +8620,9 @@
           <a:lstStyle xmlns:a="http://schemas.openxmlformats.org/drawingml/2006/main"/>
           <a:p xmlns:a="http://schemas.openxmlformats.org/drawingml/2006/main">
             <a:pPr algn="ctr">
-              <a:defRPr sz="1350" b="1">
-                <a:solidFill>
-                  <a:srgbClr val="FFFFFF"/>
+              <a:defRPr sz="1125" b="1">
+                <a:solidFill>
+                  <a:srgbClr val="2C6E73"/>
                 </a:solidFill>
                 <a:latin typeface="Arial"/>
                 <a:ea typeface="Arial"/>
@@ -8624,9 +8630,9 @@
               </a:defRPr>
             </a:pPr>
             <a:r>
-              <a:rPr sz="1350" b="1">
-                <a:solidFill>
-                  <a:srgbClr val="FFFFFF"/>
+              <a:rPr sz="1125" b="1">
+                <a:solidFill>
+                  <a:srgbClr val="2C6E73"/>
                 </a:solidFill>
                 <a:latin typeface="Arial"/>
                 <a:ea typeface="Arial"/>
@@ -8642,19 +8648,19 @@
           <p:cNvPr id="19" name="">
             <a:extLst xmlns:a="http://schemas.openxmlformats.org/drawingml/2006/main">
               <a:ext uri="{FF2B5EF4-FFF2-40B4-BE49-F238E27FC236}">
-                <a16:creationId xmlns:a16="http://schemas.microsoft.com/office/drawing/2014/main" id="{03762BA1-C7F7-4A8C-911F-3CC873183E7A}"/>
-              </a:ext>
-            </a:extLst>
-          </p:cNvPr>
-          <p:cNvSpPr>
-            <a:spLocks xmlns:a="http://schemas.openxmlformats.org/drawingml/2006/main" noGrp="1"/>
-          </p:cNvSpPr>
-          <p:nvPr/>
-        </p:nvSpPr>
-        <p:spPr>
-          <a:xfrm xmlns:a="http://schemas.openxmlformats.org/drawingml/2006/main">
-            <a:off x="1714500" y="3667125"/>
-            <a:ext cx="9429750" cy="609600"/>
+                <a16:creationId xmlns:a16="http://schemas.microsoft.com/office/drawing/2014/main" id="{AF8FADFD-5926-40A5-A8A9-20EF9E27B2BC}"/>
+              </a:ext>
+            </a:extLst>
+          </p:cNvPr>
+          <p:cNvSpPr>
+            <a:spLocks xmlns:a="http://schemas.openxmlformats.org/drawingml/2006/main" noGrp="1"/>
+          </p:cNvSpPr>
+          <p:nvPr/>
+        </p:nvSpPr>
+        <p:spPr>
+          <a:xfrm xmlns:a="http://schemas.openxmlformats.org/drawingml/2006/main">
+            <a:off x="1714500" y="3524250"/>
+            <a:ext cx="9525000" cy="638175"/>
           </a:xfrm>
           <a:prstGeom xmlns:a="http://schemas.openxmlformats.org/drawingml/2006/main" prst="rect">
             <a:avLst/>
@@ -8671,7 +8677,7 @@
           <a:lstStyle xmlns:a="http://schemas.openxmlformats.org/drawingml/2006/main"/>
           <a:p xmlns:a="http://schemas.openxmlformats.org/drawingml/2006/main">
             <a:pPr algn="l">
-              <a:defRPr sz="1500" b="0">
+              <a:defRPr sz="1575" b="0">
                 <a:solidFill>
                   <a:srgbClr val="17253A"/>
                 </a:solidFill>
@@ -8681,7 +8687,7 @@
               </a:defRPr>
             </a:pPr>
             <a:r>
-              <a:rPr sz="1500" b="0">
+              <a:rPr sz="1575" b="0">
                 <a:solidFill>
                   <a:srgbClr val="17253A"/>
                 </a:solidFill>
@@ -8689,7 +8695,7 @@
                 <a:ea typeface="Arial"/>
                 <a:cs typeface="Arial"/>
               </a:rPr>
-              <a:t>Complete the calculation: About 6,800 x 50 = 340,000.</a:t>
+              <a:t>49 → 50</a:t>
             </a:r>
           </a:p>
         </p:txBody>
@@ -8699,28 +8705,30 @@
           <p:cNvPr id="20" name="">
             <a:extLst xmlns:a="http://schemas.openxmlformats.org/drawingml/2006/main">
               <a:ext uri="{FF2B5EF4-FFF2-40B4-BE49-F238E27FC236}">
-                <a16:creationId xmlns:a16="http://schemas.microsoft.com/office/drawing/2014/main" id="{0BD6EB9B-9EE5-42DE-B9CC-A438B0CA53C2}"/>
-              </a:ext>
-            </a:extLst>
-          </p:cNvPr>
-          <p:cNvSpPr>
-            <a:spLocks xmlns:a="http://schemas.openxmlformats.org/drawingml/2006/main" noGrp="1"/>
-          </p:cNvSpPr>
-          <p:nvPr/>
-        </p:nvSpPr>
-        <p:spPr>
-          <a:xfrm xmlns:a="http://schemas.openxmlformats.org/drawingml/2006/main">
-            <a:off x="1000125" y="4476750"/>
-            <a:ext cx="476250" cy="476250"/>
-          </a:xfrm>
-          <a:prstGeom xmlns:a="http://schemas.openxmlformats.org/drawingml/2006/main" prst="ellipse">
+                <a16:creationId xmlns:a16="http://schemas.microsoft.com/office/drawing/2014/main" id="{577EBEBC-FD1A-491B-A0AE-AE72B0C86A49}"/>
+              </a:ext>
+            </a:extLst>
+          </p:cNvPr>
+          <p:cNvSpPr>
+            <a:spLocks xmlns:a="http://schemas.openxmlformats.org/drawingml/2006/main" noGrp="1"/>
+          </p:cNvSpPr>
+          <p:nvPr/>
+        </p:nvSpPr>
+        <p:spPr>
+          <a:xfrm xmlns:a="http://schemas.openxmlformats.org/drawingml/2006/main">
+            <a:off x="1714500" y="4181475"/>
+            <a:ext cx="9334500" cy="9525"/>
+          </a:xfrm>
+          <a:prstGeom xmlns:a="http://schemas.openxmlformats.org/drawingml/2006/main" prst="rect">
             <a:avLst/>
           </a:prstGeom>
           <a:solidFill xmlns:a="http://schemas.openxmlformats.org/drawingml/2006/main">
-            <a:srgbClr val="2C6E73"/>
+            <a:srgbClr val="D9E0E6"/>
           </a:solidFill>
           <a:ln xmlns:a="http://schemas.openxmlformats.org/drawingml/2006/main" w="0">
-            <a:noFill/>
+            <a:solidFill>
+              <a:srgbClr val="D9E0E6"/>
+            </a:solidFill>
           </a:ln>
         </p:spPr>
       </p:sp>
@@ -8729,19 +8737,19 @@
           <p:cNvPr id="21" name="">
             <a:extLst xmlns:a="http://schemas.openxmlformats.org/drawingml/2006/main">
               <a:ext uri="{FF2B5EF4-FFF2-40B4-BE49-F238E27FC236}">
-                <a16:creationId xmlns:a16="http://schemas.microsoft.com/office/drawing/2014/main" id="{61B3A861-144D-4040-B956-7E924CD8EA3A}"/>
-              </a:ext>
-            </a:extLst>
-          </p:cNvPr>
-          <p:cNvSpPr>
-            <a:spLocks xmlns:a="http://schemas.openxmlformats.org/drawingml/2006/main" noGrp="1"/>
-          </p:cNvSpPr>
-          <p:nvPr/>
-        </p:nvSpPr>
-        <p:spPr>
-          <a:xfrm xmlns:a="http://schemas.openxmlformats.org/drawingml/2006/main">
-            <a:off x="1000125" y="4505325"/>
-            <a:ext cx="476250" cy="419100"/>
+                <a16:creationId xmlns:a16="http://schemas.microsoft.com/office/drawing/2014/main" id="{4ADABA25-D2C2-4770-9F49-0DF2F4560CBE}"/>
+              </a:ext>
+            </a:extLst>
+          </p:cNvPr>
+          <p:cNvSpPr>
+            <a:spLocks xmlns:a="http://schemas.openxmlformats.org/drawingml/2006/main" noGrp="1"/>
+          </p:cNvSpPr>
+          <p:nvPr/>
+        </p:nvSpPr>
+        <p:spPr>
+          <a:xfrm xmlns:a="http://schemas.openxmlformats.org/drawingml/2006/main">
+            <a:off x="1162050" y="4314825"/>
+            <a:ext cx="400050" cy="400050"/>
           </a:xfrm>
           <a:prstGeom xmlns:a="http://schemas.openxmlformats.org/drawingml/2006/main" prst="rect">
             <a:avLst/>
@@ -8758,9 +8766,9 @@
           <a:lstStyle xmlns:a="http://schemas.openxmlformats.org/drawingml/2006/main"/>
           <a:p xmlns:a="http://schemas.openxmlformats.org/drawingml/2006/main">
             <a:pPr algn="ctr">
-              <a:defRPr sz="1350" b="1">
-                <a:solidFill>
-                  <a:srgbClr val="FFFFFF"/>
+              <a:defRPr sz="1125" b="1">
+                <a:solidFill>
+                  <a:srgbClr val="2C6E73"/>
                 </a:solidFill>
                 <a:latin typeface="Arial"/>
                 <a:ea typeface="Arial"/>
@@ -8768,9 +8776,9 @@
               </a:defRPr>
             </a:pPr>
             <a:r>
-              <a:rPr sz="1350" b="1">
-                <a:solidFill>
-                  <a:srgbClr val="FFFFFF"/>
+              <a:rPr sz="1125" b="1">
+                <a:solidFill>
+                  <a:srgbClr val="2C6E73"/>
                 </a:solidFill>
                 <a:latin typeface="Arial"/>
                 <a:ea typeface="Arial"/>
@@ -8786,19 +8794,19 @@
           <p:cNvPr id="22" name="">
             <a:extLst xmlns:a="http://schemas.openxmlformats.org/drawingml/2006/main">
               <a:ext uri="{FF2B5EF4-FFF2-40B4-BE49-F238E27FC236}">
-                <a16:creationId xmlns:a16="http://schemas.microsoft.com/office/drawing/2014/main" id="{ACB6D78F-6150-44CE-8F2C-0657B42A0E44}"/>
-              </a:ext>
-            </a:extLst>
-          </p:cNvPr>
-          <p:cNvSpPr>
-            <a:spLocks xmlns:a="http://schemas.openxmlformats.org/drawingml/2006/main" noGrp="1"/>
-          </p:cNvSpPr>
-          <p:nvPr/>
-        </p:nvSpPr>
-        <p:spPr>
-          <a:xfrm xmlns:a="http://schemas.openxmlformats.org/drawingml/2006/main">
-            <a:off x="1714500" y="4410075"/>
-            <a:ext cx="9429750" cy="609600"/>
+                <a16:creationId xmlns:a16="http://schemas.microsoft.com/office/drawing/2014/main" id="{6DBC96D4-F883-48EC-9B3D-250FF8AC7D02}"/>
+              </a:ext>
+            </a:extLst>
+          </p:cNvPr>
+          <p:cNvSpPr>
+            <a:spLocks xmlns:a="http://schemas.openxmlformats.org/drawingml/2006/main" noGrp="1"/>
+          </p:cNvSpPr>
+          <p:nvPr/>
+        </p:nvSpPr>
+        <p:spPr>
+          <a:xfrm xmlns:a="http://schemas.openxmlformats.org/drawingml/2006/main">
+            <a:off x="1714500" y="4229100"/>
+            <a:ext cx="9525000" cy="638175"/>
           </a:xfrm>
           <a:prstGeom xmlns:a="http://schemas.openxmlformats.org/drawingml/2006/main" prst="rect">
             <a:avLst/>
@@ -8815,9 +8823,9 @@
           <a:lstStyle xmlns:a="http://schemas.openxmlformats.org/drawingml/2006/main"/>
           <a:p xmlns:a="http://schemas.openxmlformats.org/drawingml/2006/main">
             <a:pPr algn="l">
-              <a:defRPr sz="1500" b="1">
-                <a:solidFill>
-                  <a:srgbClr val="2F785D"/>
+              <a:defRPr sz="1575" b="0">
+                <a:solidFill>
+                  <a:srgbClr val="17253A"/>
                 </a:solidFill>
                 <a:latin typeface="Arial"/>
                 <a:ea typeface="Arial"/>
@@ -8825,15 +8833,161 @@
               </a:defRPr>
             </a:pPr>
             <a:r>
-              <a:rPr sz="1500" b="1">
+              <a:rPr sz="1575" b="0">
+                <a:solidFill>
+                  <a:srgbClr val="17253A"/>
+                </a:solidFill>
+                <a:latin typeface="Arial"/>
+                <a:ea typeface="Arial"/>
+                <a:cs typeface="Arial"/>
+              </a:rPr>
+              <a:t>6,800 × 50</a:t>
+            </a:r>
+          </a:p>
+        </p:txBody>
+      </p:sp>
+      <p:sp>
+        <p:nvSpPr>
+          <p:cNvPr id="23" name="">
+            <a:extLst xmlns:a="http://schemas.openxmlformats.org/drawingml/2006/main">
+              <a:ext uri="{FF2B5EF4-FFF2-40B4-BE49-F238E27FC236}">
+                <a16:creationId xmlns:a16="http://schemas.microsoft.com/office/drawing/2014/main" id="{B2B31676-D0C4-4389-AD0B-B4F7D38996CE}"/>
+              </a:ext>
+            </a:extLst>
+          </p:cNvPr>
+          <p:cNvSpPr>
+            <a:spLocks xmlns:a="http://schemas.openxmlformats.org/drawingml/2006/main" noGrp="1"/>
+          </p:cNvSpPr>
+          <p:nvPr/>
+        </p:nvSpPr>
+        <p:spPr>
+          <a:xfrm xmlns:a="http://schemas.openxmlformats.org/drawingml/2006/main">
+            <a:off x="1714500" y="4886325"/>
+            <a:ext cx="9334500" cy="9525"/>
+          </a:xfrm>
+          <a:prstGeom xmlns:a="http://schemas.openxmlformats.org/drawingml/2006/main" prst="rect">
+            <a:avLst/>
+          </a:prstGeom>
+          <a:solidFill xmlns:a="http://schemas.openxmlformats.org/drawingml/2006/main">
+            <a:srgbClr val="D9E0E6"/>
+          </a:solidFill>
+          <a:ln xmlns:a="http://schemas.openxmlformats.org/drawingml/2006/main" w="0">
+            <a:solidFill>
+              <a:srgbClr val="D9E0E6"/>
+            </a:solidFill>
+          </a:ln>
+        </p:spPr>
+      </p:sp>
+      <p:sp>
+        <p:nvSpPr>
+          <p:cNvPr id="24" name="">
+            <a:extLst xmlns:a="http://schemas.openxmlformats.org/drawingml/2006/main">
+              <a:ext uri="{FF2B5EF4-FFF2-40B4-BE49-F238E27FC236}">
+                <a16:creationId xmlns:a16="http://schemas.microsoft.com/office/drawing/2014/main" id="{5C8A8BD0-6AAC-4C2C-9552-FC38756D133C}"/>
+              </a:ext>
+            </a:extLst>
+          </p:cNvPr>
+          <p:cNvSpPr>
+            <a:spLocks xmlns:a="http://schemas.openxmlformats.org/drawingml/2006/main" noGrp="1"/>
+          </p:cNvSpPr>
+          <p:nvPr/>
+        </p:nvSpPr>
+        <p:spPr>
+          <a:xfrm xmlns:a="http://schemas.openxmlformats.org/drawingml/2006/main">
+            <a:off x="1162050" y="5019675"/>
+            <a:ext cx="400050" cy="400050"/>
+          </a:xfrm>
+          <a:prstGeom xmlns:a="http://schemas.openxmlformats.org/drawingml/2006/main" prst="rect">
+            <a:avLst/>
+          </a:prstGeom>
+          <a:noFill xmlns:a="http://schemas.openxmlformats.org/drawingml/2006/main"/>
+          <a:ln xmlns:a="http://schemas.openxmlformats.org/drawingml/2006/main" w="0">
+            <a:noFill/>
+          </a:ln>
+        </p:spPr>
+        <p:txBody>
+          <a:bodyPr xmlns:a="http://schemas.openxmlformats.org/drawingml/2006/main" anchor="ctr">
+            <a:normAutofit fontScale="100000"/>
+          </a:bodyPr>
+          <a:lstStyle xmlns:a="http://schemas.openxmlformats.org/drawingml/2006/main"/>
+          <a:p xmlns:a="http://schemas.openxmlformats.org/drawingml/2006/main">
+            <a:pPr algn="ctr">
+              <a:defRPr sz="1125" b="1">
                 <a:solidFill>
                   <a:srgbClr val="2F785D"/>
                 </a:solidFill>
                 <a:latin typeface="Arial"/>
                 <a:ea typeface="Arial"/>
                 <a:cs typeface="Arial"/>
+              </a:defRPr>
+            </a:pPr>
+            <a:r>
+              <a:rPr sz="1125" b="1">
+                <a:solidFill>
+                  <a:srgbClr val="2F785D"/>
+                </a:solidFill>
+                <a:latin typeface="Arial"/>
+                <a:ea typeface="Arial"/>
+                <a:cs typeface="Arial"/>
               </a:rPr>
-              <a:t>Check the result: Check the size of the result using estimation or an inverse operation.</a:t>
+              <a:t>5</a:t>
+            </a:r>
+          </a:p>
+        </p:txBody>
+      </p:sp>
+      <p:sp>
+        <p:nvSpPr>
+          <p:cNvPr id="25" name="">
+            <a:extLst xmlns:a="http://schemas.openxmlformats.org/drawingml/2006/main">
+              <a:ext uri="{FF2B5EF4-FFF2-40B4-BE49-F238E27FC236}">
+                <a16:creationId xmlns:a16="http://schemas.microsoft.com/office/drawing/2014/main" id="{8FC4DFF3-B982-4D19-A40F-A12FA44BFF62}"/>
+              </a:ext>
+            </a:extLst>
+          </p:cNvPr>
+          <p:cNvSpPr>
+            <a:spLocks xmlns:a="http://schemas.openxmlformats.org/drawingml/2006/main" noGrp="1"/>
+          </p:cNvSpPr>
+          <p:nvPr/>
+        </p:nvSpPr>
+        <p:spPr>
+          <a:xfrm xmlns:a="http://schemas.openxmlformats.org/drawingml/2006/main">
+            <a:off x="1714500" y="4933950"/>
+            <a:ext cx="9525000" cy="638175"/>
+          </a:xfrm>
+          <a:prstGeom xmlns:a="http://schemas.openxmlformats.org/drawingml/2006/main" prst="rect">
+            <a:avLst/>
+          </a:prstGeom>
+          <a:noFill xmlns:a="http://schemas.openxmlformats.org/drawingml/2006/main"/>
+          <a:ln xmlns:a="http://schemas.openxmlformats.org/drawingml/2006/main" w="0">
+            <a:noFill/>
+          </a:ln>
+        </p:spPr>
+        <p:txBody>
+          <a:bodyPr xmlns:a="http://schemas.openxmlformats.org/drawingml/2006/main" anchor="ctr">
+            <a:normAutofit fontScale="100000"/>
+          </a:bodyPr>
+          <a:lstStyle xmlns:a="http://schemas.openxmlformats.org/drawingml/2006/main"/>
+          <a:p xmlns:a="http://schemas.openxmlformats.org/drawingml/2006/main">
+            <a:pPr algn="l">
+              <a:defRPr sz="1575" b="1">
+                <a:solidFill>
+                  <a:srgbClr val="2F785D"/>
+                </a:solidFill>
+                <a:latin typeface="Arial"/>
+                <a:ea typeface="Arial"/>
+                <a:cs typeface="Arial"/>
+              </a:defRPr>
+            </a:pPr>
+            <a:r>
+              <a:rPr sz="1575" b="1">
+                <a:solidFill>
+                  <a:srgbClr val="2F785D"/>
+                </a:solidFill>
+                <a:latin typeface="Arial"/>
+                <a:ea typeface="Arial"/>
+                <a:cs typeface="Arial"/>
+              </a:rPr>
+              <a:t>Estimate = 340,000</a:t>
             </a:r>
           </a:p>
         </p:txBody>
@@ -8841,7 +8995,7 @@
     </p:spTree>
     <p:extLst>
       <p:ext uri="{BB962C8B-B14F-4D97-AF65-F5344CB8AC3E}">
-        <p14:creationId xmlns:p14="http://schemas.microsoft.com/office/powerpoint/2010/main" val="569596190"/>
+        <p14:creationId xmlns:p14="http://schemas.microsoft.com/office/powerpoint/2010/main" val="1583937389"/>
       </p:ext>
     </p:extLst>
   </p:cSld>
@@ -9078,6 +9232,51 @@
                       </p:childTnLst>
                     </p:cTn>
                   </p:par>
+                  <p:par>
+                    <p:cTn id="23" fill="hold">
+                      <p:stCondLst>
+                        <p:cond delay="indefinite"/>
+                      </p:stCondLst>
+                      <p:childTnLst>
+                        <p:par>
+                          <p:cTn id="24" fill="hold">
+                            <p:stCondLst>
+                              <p:cond delay="0"/>
+                            </p:stCondLst>
+                            <p:childTnLst>
+                              <p:par>
+                                <p:cTn id="25" presetID="1" presetClass="entr" presetSubtype="0" fill="hold" grpId="0" nodeType="clickEffect">
+                                  <p:stCondLst>
+                                    <p:cond delay="0"/>
+                                  </p:stCondLst>
+                                  <p:childTnLst>
+                                    <p:set>
+                                      <p:cBhvr>
+                                        <p:cTn id="26" dur="1" fill="hold">
+                                          <p:stCondLst>
+                                            <p:cond delay="0"/>
+                                          </p:stCondLst>
+                                        </p:cTn>
+                                        <p:tgtEl>
+                                          <p:spTgt spid="25"/>
+                                        </p:tgtEl>
+                                        <p:attrNameLst>
+                                          <p:attrName>style.visibility</p:attrName>
+                                        </p:attrNameLst>
+                                      </p:cBhvr>
+                                      <p:to>
+                                        <p:strVal val="visible"/>
+                                      </p:to>
+                                    </p:set>
+                                  </p:childTnLst>
+                                </p:cTn>
+                              </p:par>
+                            </p:childTnLst>
+                          </p:cTn>
+                        </p:par>
+                      </p:childTnLst>
+                    </p:cTn>
+                  </p:par>
                 </p:childTnLst>
               </p:cTn>
               <p:prevCondLst>
@@ -9105,6 +9304,7 @@
       <p:bldP spid="16" grpId="0"/>
       <p:bldP spid="19" grpId="0"/>
       <p:bldP spid="22" grpId="0"/>
+      <p:bldP spid="25" grpId="0"/>
     </p:bldLst>
   </p:timing>
 </p:sld>
@@ -9134,7 +9334,7 @@
           <p:cNvPr id="15" name="">
             <a:extLst xmlns:a="http://schemas.openxmlformats.org/drawingml/2006/main">
               <a:ext uri="{FF2B5EF4-FFF2-40B4-BE49-F238E27FC236}">
-                <a16:creationId xmlns:a16="http://schemas.microsoft.com/office/drawing/2014/main" id="{3F2CF823-0650-4E4C-8DC3-F037A4564316}"/>
+                <a16:creationId xmlns:a16="http://schemas.microsoft.com/office/drawing/2014/main" id="{2F502EEE-FC40-4E64-8CCB-5F63AC597470}"/>
               </a:ext>
             </a:extLst>
           </p:cNvPr>
@@ -9166,7 +9366,7 @@
           <p:cNvPr id="2" name="">
             <a:extLst xmlns:a="http://schemas.openxmlformats.org/drawingml/2006/main">
               <a:ext uri="{FF2B5EF4-FFF2-40B4-BE49-F238E27FC236}">
-                <a16:creationId xmlns:a16="http://schemas.microsoft.com/office/drawing/2014/main" id="{33C7F199-F0AB-4EC1-8D78-7446CF8FA694}"/>
+                <a16:creationId xmlns:a16="http://schemas.microsoft.com/office/drawing/2014/main" id="{6BEBE4F2-13C2-4787-B4BD-DA68C7429463}"/>
               </a:ext>
             </a:extLst>
           </p:cNvPr>
@@ -9223,7 +9423,7 @@
           <p:cNvPr id="3" name="">
             <a:extLst xmlns:a="http://schemas.openxmlformats.org/drawingml/2006/main">
               <a:ext uri="{FF2B5EF4-FFF2-40B4-BE49-F238E27FC236}">
-                <a16:creationId xmlns:a16="http://schemas.microsoft.com/office/drawing/2014/main" id="{D324017E-DD48-4A41-96C9-30CC55682EA6}"/>
+                <a16:creationId xmlns:a16="http://schemas.microsoft.com/office/drawing/2014/main" id="{BAA0B30D-56A4-41DA-B3B0-63A4246BF9D4}"/>
               </a:ext>
             </a:extLst>
           </p:cNvPr>
@@ -9255,7 +9455,7 @@
           <p:cNvPr id="4" name="">
             <a:extLst xmlns:a="http://schemas.openxmlformats.org/drawingml/2006/main">
               <a:ext uri="{FF2B5EF4-FFF2-40B4-BE49-F238E27FC236}">
-                <a16:creationId xmlns:a16="http://schemas.microsoft.com/office/drawing/2014/main" id="{5F1569D1-C7D9-444E-AEF5-4C88CB2FC060}"/>
+                <a16:creationId xmlns:a16="http://schemas.microsoft.com/office/drawing/2014/main" id="{2C6290A1-B78E-40BB-A762-C0D01241EA9B}"/>
               </a:ext>
             </a:extLst>
           </p:cNvPr>
@@ -9312,7 +9512,7 @@
           <p:cNvPr id="5" name="">
             <a:extLst xmlns:a="http://schemas.openxmlformats.org/drawingml/2006/main">
               <a:ext uri="{FF2B5EF4-FFF2-40B4-BE49-F238E27FC236}">
-                <a16:creationId xmlns:a16="http://schemas.microsoft.com/office/drawing/2014/main" id="{F4371936-C5D0-4EC8-8C17-2DB8C8EA6FA8}"/>
+                <a16:creationId xmlns:a16="http://schemas.microsoft.com/office/drawing/2014/main" id="{B15CD6E4-25A9-4419-9398-105DD9471E52}"/>
               </a:ext>
             </a:extLst>
           </p:cNvPr>
@@ -9369,7 +9569,7 @@
           <p:cNvPr id="6" name="">
             <a:extLst xmlns:a="http://schemas.openxmlformats.org/drawingml/2006/main">
               <a:ext uri="{FF2B5EF4-FFF2-40B4-BE49-F238E27FC236}">
-                <a16:creationId xmlns:a16="http://schemas.microsoft.com/office/drawing/2014/main" id="{0E534C7A-114A-457B-9B3B-20C465A4911C}"/>
+                <a16:creationId xmlns:a16="http://schemas.microsoft.com/office/drawing/2014/main" id="{7A84AFF1-DA46-4EC4-8CC3-E0EBCC675BCE}"/>
               </a:ext>
             </a:extLst>
           </p:cNvPr>
@@ -9426,7 +9626,7 @@
           <p:cNvPr id="7" name="">
             <a:extLst xmlns:a="http://schemas.openxmlformats.org/drawingml/2006/main">
               <a:ext uri="{FF2B5EF4-FFF2-40B4-BE49-F238E27FC236}">
-                <a16:creationId xmlns:a16="http://schemas.microsoft.com/office/drawing/2014/main" id="{5BBD3B14-4F89-4815-918C-8568AD3C389F}"/>
+                <a16:creationId xmlns:a16="http://schemas.microsoft.com/office/drawing/2014/main" id="{A36543AB-DCB2-45D7-8768-08EBD98D44C8}"/>
               </a:ext>
             </a:extLst>
           </p:cNvPr>
@@ -9458,7 +9658,7 @@
           <p:cNvPr id="8" name="">
             <a:extLst xmlns:a="http://schemas.openxmlformats.org/drawingml/2006/main">
               <a:ext uri="{FF2B5EF4-FFF2-40B4-BE49-F238E27FC236}">
-                <a16:creationId xmlns:a16="http://schemas.microsoft.com/office/drawing/2014/main" id="{911E4D75-31C7-414A-80AD-DDEF45919B84}"/>
+                <a16:creationId xmlns:a16="http://schemas.microsoft.com/office/drawing/2014/main" id="{3DE99965-EE9D-46F7-8769-F591C6741E5E}"/>
               </a:ext>
             </a:extLst>
           </p:cNvPr>
@@ -9515,7 +9715,7 @@
           <p:cNvPr id="9" name="">
             <a:extLst xmlns:a="http://schemas.openxmlformats.org/drawingml/2006/main">
               <a:ext uri="{FF2B5EF4-FFF2-40B4-BE49-F238E27FC236}">
-                <a16:creationId xmlns:a16="http://schemas.microsoft.com/office/drawing/2014/main" id="{DFBD77FE-A069-4C68-8AA8-951A374ECC96}"/>
+                <a16:creationId xmlns:a16="http://schemas.microsoft.com/office/drawing/2014/main" id="{F63C0102-4B89-4DE1-92BC-143D62654E0B}"/>
               </a:ext>
             </a:extLst>
           </p:cNvPr>
@@ -9572,7 +9772,7 @@
           <p:cNvPr id="10" name="">
             <a:extLst xmlns:a="http://schemas.openxmlformats.org/drawingml/2006/main">
               <a:ext uri="{FF2B5EF4-FFF2-40B4-BE49-F238E27FC236}">
-                <a16:creationId xmlns:a16="http://schemas.microsoft.com/office/drawing/2014/main" id="{3AEFE0B5-1C36-45EA-ACF7-DEEC58A114A3}"/>
+                <a16:creationId xmlns:a16="http://schemas.microsoft.com/office/drawing/2014/main" id="{FAA85E54-17AD-44B0-AB40-DC2EB71FEE21}"/>
               </a:ext>
             </a:extLst>
           </p:cNvPr>
@@ -9629,7 +9829,7 @@
           <p:cNvPr id="11" name="">
             <a:extLst xmlns:a="http://schemas.openxmlformats.org/drawingml/2006/main">
               <a:ext uri="{FF2B5EF4-FFF2-40B4-BE49-F238E27FC236}">
-                <a16:creationId xmlns:a16="http://schemas.microsoft.com/office/drawing/2014/main" id="{A1709C9A-2522-4C7A-B974-62F571E6A7EB}"/>
+                <a16:creationId xmlns:a16="http://schemas.microsoft.com/office/drawing/2014/main" id="{A0463E5D-0BB4-4588-8537-D41CE386DB07}"/>
               </a:ext>
             </a:extLst>
           </p:cNvPr>
@@ -9686,7 +9886,7 @@
           <p:cNvPr id="12" name="">
             <a:extLst xmlns:a="http://schemas.openxmlformats.org/drawingml/2006/main">
               <a:ext uri="{FF2B5EF4-FFF2-40B4-BE49-F238E27FC236}">
-                <a16:creationId xmlns:a16="http://schemas.microsoft.com/office/drawing/2014/main" id="{9811DBCB-A9DB-4F04-A181-F99C886A815D}"/>
+                <a16:creationId xmlns:a16="http://schemas.microsoft.com/office/drawing/2014/main" id="{79A4777B-A5E2-4892-97D4-F02168C366CE}"/>
               </a:ext>
             </a:extLst>
           </p:cNvPr>
@@ -9718,7 +9918,7 @@
           <p:cNvPr id="13" name="">
             <a:extLst xmlns:a="http://schemas.openxmlformats.org/drawingml/2006/main">
               <a:ext uri="{FF2B5EF4-FFF2-40B4-BE49-F238E27FC236}">
-                <a16:creationId xmlns:a16="http://schemas.microsoft.com/office/drawing/2014/main" id="{86AC1A4A-0D2D-42D6-B8C4-EE8FD63F2B95}"/>
+                <a16:creationId xmlns:a16="http://schemas.microsoft.com/office/drawing/2014/main" id="{82FEABFA-621B-43B0-ABAF-F5A615F12FE2}"/>
               </a:ext>
             </a:extLst>
           </p:cNvPr>
@@ -9775,7 +9975,7 @@
           <p:cNvPr id="14" name="">
             <a:extLst xmlns:a="http://schemas.openxmlformats.org/drawingml/2006/main">
               <a:ext uri="{FF2B5EF4-FFF2-40B4-BE49-F238E27FC236}">
-                <a16:creationId xmlns:a16="http://schemas.microsoft.com/office/drawing/2014/main" id="{13750172-8A06-4B8A-8D61-EBD841F0FB13}"/>
+                <a16:creationId xmlns:a16="http://schemas.microsoft.com/office/drawing/2014/main" id="{DF35292C-81AB-4ED9-9528-3661E7ECCFD6}"/>
               </a:ext>
             </a:extLst>
           </p:cNvPr>
@@ -9830,7 +10030,7 @@
     </p:spTree>
     <p:extLst>
       <p:ext uri="{BB962C8B-B14F-4D97-AF65-F5344CB8AC3E}">
-        <p14:creationId xmlns:p14="http://schemas.microsoft.com/office/powerpoint/2010/main" val="981469823"/>
+        <p14:creationId xmlns:p14="http://schemas.microsoft.com/office/powerpoint/2010/main" val="1019799067"/>
       </p:ext>
     </p:extLst>
   </p:cSld>
@@ -10031,7 +10231,7 @@
           <p:cNvPr id="16" name="">
             <a:extLst xmlns:a="http://schemas.openxmlformats.org/drawingml/2006/main">
               <a:ext uri="{FF2B5EF4-FFF2-40B4-BE49-F238E27FC236}">
-                <a16:creationId xmlns:a16="http://schemas.microsoft.com/office/drawing/2014/main" id="{312D7165-1AA0-4C15-95B0-2F3A7DD1DBC7}"/>
+                <a16:creationId xmlns:a16="http://schemas.microsoft.com/office/drawing/2014/main" id="{F12FD65A-6F7A-4371-B6D1-F0E1373A5F87}"/>
               </a:ext>
             </a:extLst>
           </p:cNvPr>
@@ -10063,7 +10263,7 @@
           <p:cNvPr id="2" name="">
             <a:extLst xmlns:a="http://schemas.openxmlformats.org/drawingml/2006/main">
               <a:ext uri="{FF2B5EF4-FFF2-40B4-BE49-F238E27FC236}">
-                <a16:creationId xmlns:a16="http://schemas.microsoft.com/office/drawing/2014/main" id="{997D7D93-27E6-43F6-8AA4-CC2E25473271}"/>
+                <a16:creationId xmlns:a16="http://schemas.microsoft.com/office/drawing/2014/main" id="{417BD915-9574-4D34-BA0A-5CDCC30CFB72}"/>
               </a:ext>
             </a:extLst>
           </p:cNvPr>
@@ -10120,7 +10320,7 @@
           <p:cNvPr id="3" name="">
             <a:extLst xmlns:a="http://schemas.openxmlformats.org/drawingml/2006/main">
               <a:ext uri="{FF2B5EF4-FFF2-40B4-BE49-F238E27FC236}">
-                <a16:creationId xmlns:a16="http://schemas.microsoft.com/office/drawing/2014/main" id="{1AC9A1CA-0475-454C-904C-970B5B5D51E8}"/>
+                <a16:creationId xmlns:a16="http://schemas.microsoft.com/office/drawing/2014/main" id="{40431553-43E4-4434-9100-44314C645A32}"/>
               </a:ext>
             </a:extLst>
           </p:cNvPr>
@@ -10152,7 +10352,7 @@
           <p:cNvPr id="4" name="">
             <a:extLst xmlns:a="http://schemas.openxmlformats.org/drawingml/2006/main">
               <a:ext uri="{FF2B5EF4-FFF2-40B4-BE49-F238E27FC236}">
-                <a16:creationId xmlns:a16="http://schemas.microsoft.com/office/drawing/2014/main" id="{0638D081-6005-495D-975B-68F1CDDAFE95}"/>
+                <a16:creationId xmlns:a16="http://schemas.microsoft.com/office/drawing/2014/main" id="{3C67CF4A-A237-40AD-A3B1-BB1DDC38E7F1}"/>
               </a:ext>
             </a:extLst>
           </p:cNvPr>
@@ -10209,7 +10409,7 @@
           <p:cNvPr id="5" name="">
             <a:extLst xmlns:a="http://schemas.openxmlformats.org/drawingml/2006/main">
               <a:ext uri="{FF2B5EF4-FFF2-40B4-BE49-F238E27FC236}">
-                <a16:creationId xmlns:a16="http://schemas.microsoft.com/office/drawing/2014/main" id="{1808702C-1F05-45DC-A8A2-5DFD5B08E332}"/>
+                <a16:creationId xmlns:a16="http://schemas.microsoft.com/office/drawing/2014/main" id="{A062B44E-C918-4204-9A05-E7BEE3A4C3E9}"/>
               </a:ext>
             </a:extLst>
           </p:cNvPr>
@@ -10266,7 +10466,7 @@
           <p:cNvPr id="6" name="">
             <a:extLst xmlns:a="http://schemas.openxmlformats.org/drawingml/2006/main">
               <a:ext uri="{FF2B5EF4-FFF2-40B4-BE49-F238E27FC236}">
-                <a16:creationId xmlns:a16="http://schemas.microsoft.com/office/drawing/2014/main" id="{34C0BA59-A84E-41CD-B43B-5E5F4398F4C2}"/>
+                <a16:creationId xmlns:a16="http://schemas.microsoft.com/office/drawing/2014/main" id="{3EFB19F9-38B5-4477-8FEB-D22FA043D1A5}"/>
               </a:ext>
             </a:extLst>
           </p:cNvPr>
@@ -10323,7 +10523,7 @@
           <p:cNvPr id="7" name="">
             <a:extLst xmlns:a="http://schemas.openxmlformats.org/drawingml/2006/main">
               <a:ext uri="{FF2B5EF4-FFF2-40B4-BE49-F238E27FC236}">
-                <a16:creationId xmlns:a16="http://schemas.microsoft.com/office/drawing/2014/main" id="{99CB59EA-1AE0-4528-9534-65CC66D03E13}"/>
+                <a16:creationId xmlns:a16="http://schemas.microsoft.com/office/drawing/2014/main" id="{61F1CF66-7788-4870-B604-035862780275}"/>
               </a:ext>
             </a:extLst>
           </p:cNvPr>
@@ -10355,7 +10555,7 @@
           <p:cNvPr id="8" name="">
             <a:extLst xmlns:a="http://schemas.openxmlformats.org/drawingml/2006/main">
               <a:ext uri="{FF2B5EF4-FFF2-40B4-BE49-F238E27FC236}">
-                <a16:creationId xmlns:a16="http://schemas.microsoft.com/office/drawing/2014/main" id="{ED8046D8-D047-4531-8E5F-7B60B900E7AF}"/>
+                <a16:creationId xmlns:a16="http://schemas.microsoft.com/office/drawing/2014/main" id="{395B2744-4A57-4FE5-877D-A8D5D8BF97B6}"/>
               </a:ext>
             </a:extLst>
           </p:cNvPr>
@@ -10412,7 +10612,7 @@
           <p:cNvPr id="9" name="">
             <a:extLst xmlns:a="http://schemas.openxmlformats.org/drawingml/2006/main">
               <a:ext uri="{FF2B5EF4-FFF2-40B4-BE49-F238E27FC236}">
-                <a16:creationId xmlns:a16="http://schemas.microsoft.com/office/drawing/2014/main" id="{C36CA601-4E75-415F-818E-461491BECC81}"/>
+                <a16:creationId xmlns:a16="http://schemas.microsoft.com/office/drawing/2014/main" id="{B652DB08-1DE6-4AC0-9FF3-06CC3ED84758}"/>
               </a:ext>
             </a:extLst>
           </p:cNvPr>
@@ -10469,7 +10669,7 @@
           <p:cNvPr id="10" name="">
             <a:extLst xmlns:a="http://schemas.openxmlformats.org/drawingml/2006/main">
               <a:ext uri="{FF2B5EF4-FFF2-40B4-BE49-F238E27FC236}">
-                <a16:creationId xmlns:a16="http://schemas.microsoft.com/office/drawing/2014/main" id="{D596098D-0B26-443A-9009-0087A17A7BD2}"/>
+                <a16:creationId xmlns:a16="http://schemas.microsoft.com/office/drawing/2014/main" id="{12336468-EDEF-4E5F-8AB9-E37C3AADD075}"/>
               </a:ext>
             </a:extLst>
           </p:cNvPr>
@@ -10526,7 +10726,7 @@
           <p:cNvPr id="11" name="">
             <a:extLst xmlns:a="http://schemas.openxmlformats.org/drawingml/2006/main">
               <a:ext uri="{FF2B5EF4-FFF2-40B4-BE49-F238E27FC236}">
-                <a16:creationId xmlns:a16="http://schemas.microsoft.com/office/drawing/2014/main" id="{DD2A8D25-9979-4EE2-B4F4-ED9EC575E134}"/>
+                <a16:creationId xmlns:a16="http://schemas.microsoft.com/office/drawing/2014/main" id="{8E73F508-6DA9-49E9-9F2E-C6F9D055375D}"/>
               </a:ext>
             </a:extLst>
           </p:cNvPr>
@@ -10583,7 +10783,7 @@
           <p:cNvPr id="12" name="">
             <a:extLst xmlns:a="http://schemas.openxmlformats.org/drawingml/2006/main">
               <a:ext uri="{FF2B5EF4-FFF2-40B4-BE49-F238E27FC236}">
-                <a16:creationId xmlns:a16="http://schemas.microsoft.com/office/drawing/2014/main" id="{AA941D6A-0DBB-4803-8394-73D326247EDA}"/>
+                <a16:creationId xmlns:a16="http://schemas.microsoft.com/office/drawing/2014/main" id="{435DD84F-44E9-4442-A0D6-4C19162DED3D}"/>
               </a:ext>
             </a:extLst>
           </p:cNvPr>
@@ -10640,7 +10840,7 @@
           <p:cNvPr id="13" name="">
             <a:extLst xmlns:a="http://schemas.openxmlformats.org/drawingml/2006/main">
               <a:ext uri="{FF2B5EF4-FFF2-40B4-BE49-F238E27FC236}">
-                <a16:creationId xmlns:a16="http://schemas.microsoft.com/office/drawing/2014/main" id="{0FBF08AC-3B6E-4A83-B6F0-FEC0BB1E6FBB}"/>
+                <a16:creationId xmlns:a16="http://schemas.microsoft.com/office/drawing/2014/main" id="{03343009-C77F-4D01-9846-9F23501539A5}"/>
               </a:ext>
             </a:extLst>
           </p:cNvPr>
@@ -10697,7 +10897,7 @@
           <p:cNvPr id="14" name="">
             <a:extLst xmlns:a="http://schemas.openxmlformats.org/drawingml/2006/main">
               <a:ext uri="{FF2B5EF4-FFF2-40B4-BE49-F238E27FC236}">
-                <a16:creationId xmlns:a16="http://schemas.microsoft.com/office/drawing/2014/main" id="{FCD42A63-C6D3-4BEE-A51E-E2F435F77427}"/>
+                <a16:creationId xmlns:a16="http://schemas.microsoft.com/office/drawing/2014/main" id="{7497332B-40E2-4A02-86E9-47F9214F003C}"/>
               </a:ext>
             </a:extLst>
           </p:cNvPr>
@@ -10754,7 +10954,7 @@
           <p:cNvPr id="15" name="">
             <a:extLst xmlns:a="http://schemas.openxmlformats.org/drawingml/2006/main">
               <a:ext uri="{FF2B5EF4-FFF2-40B4-BE49-F238E27FC236}">
-                <a16:creationId xmlns:a16="http://schemas.microsoft.com/office/drawing/2014/main" id="{B786F986-65CE-4670-BB2E-EADA2ADDF55F}"/>
+                <a16:creationId xmlns:a16="http://schemas.microsoft.com/office/drawing/2014/main" id="{5509338E-6EEF-4FD8-982C-8BB44FC2B5F4}"/>
               </a:ext>
             </a:extLst>
           </p:cNvPr>
@@ -10809,7 +11009,7 @@
     </p:spTree>
     <p:extLst>
       <p:ext uri="{BB962C8B-B14F-4D97-AF65-F5344CB8AC3E}">
-        <p14:creationId xmlns:p14="http://schemas.microsoft.com/office/powerpoint/2010/main" val="1386404242"/>
+        <p14:creationId xmlns:p14="http://schemas.microsoft.com/office/powerpoint/2010/main" val="224772831"/>
       </p:ext>
     </p:extLst>
   </p:cSld>
@@ -10964,7 +11164,7 @@
           <p:cNvPr id="16" name="">
             <a:extLst xmlns:a="http://schemas.openxmlformats.org/drawingml/2006/main">
               <a:ext uri="{FF2B5EF4-FFF2-40B4-BE49-F238E27FC236}">
-                <a16:creationId xmlns:a16="http://schemas.microsoft.com/office/drawing/2014/main" id="{9C7B9516-D0CE-4990-A950-DF0985333B46}"/>
+                <a16:creationId xmlns:a16="http://schemas.microsoft.com/office/drawing/2014/main" id="{927600F8-25E8-4128-8691-31DF448D134C}"/>
               </a:ext>
             </a:extLst>
           </p:cNvPr>
@@ -10996,7 +11196,7 @@
           <p:cNvPr id="2" name="">
             <a:extLst xmlns:a="http://schemas.openxmlformats.org/drawingml/2006/main">
               <a:ext uri="{FF2B5EF4-FFF2-40B4-BE49-F238E27FC236}">
-                <a16:creationId xmlns:a16="http://schemas.microsoft.com/office/drawing/2014/main" id="{3E463618-87F8-4D8A-989C-8B2A36B9FF28}"/>
+                <a16:creationId xmlns:a16="http://schemas.microsoft.com/office/drawing/2014/main" id="{FF978450-AC5B-4A0F-AC59-E179C3692508}"/>
               </a:ext>
             </a:extLst>
           </p:cNvPr>
@@ -11053,7 +11253,7 @@
           <p:cNvPr id="3" name="">
             <a:extLst xmlns:a="http://schemas.openxmlformats.org/drawingml/2006/main">
               <a:ext uri="{FF2B5EF4-FFF2-40B4-BE49-F238E27FC236}">
-                <a16:creationId xmlns:a16="http://schemas.microsoft.com/office/drawing/2014/main" id="{2E13DE0A-19F1-43AF-8F5F-ABE42FD876D3}"/>
+                <a16:creationId xmlns:a16="http://schemas.microsoft.com/office/drawing/2014/main" id="{38B77111-756D-4D35-B521-0116E518BE0D}"/>
               </a:ext>
             </a:extLst>
           </p:cNvPr>
@@ -11085,7 +11285,7 @@
           <p:cNvPr id="4" name="">
             <a:extLst xmlns:a="http://schemas.openxmlformats.org/drawingml/2006/main">
               <a:ext uri="{FF2B5EF4-FFF2-40B4-BE49-F238E27FC236}">
-                <a16:creationId xmlns:a16="http://schemas.microsoft.com/office/drawing/2014/main" id="{2BFBE612-0389-4BDC-BF24-F72CC8DD59B9}"/>
+                <a16:creationId xmlns:a16="http://schemas.microsoft.com/office/drawing/2014/main" id="{99D86EFB-9F3F-445F-8EB3-3DB1E545FC86}"/>
               </a:ext>
             </a:extLst>
           </p:cNvPr>
@@ -11142,7 +11342,7 @@
           <p:cNvPr id="5" name="">
             <a:extLst xmlns:a="http://schemas.openxmlformats.org/drawingml/2006/main">
               <a:ext uri="{FF2B5EF4-FFF2-40B4-BE49-F238E27FC236}">
-                <a16:creationId xmlns:a16="http://schemas.microsoft.com/office/drawing/2014/main" id="{822B4B4C-D07A-41B3-A144-8087395F8BE7}"/>
+                <a16:creationId xmlns:a16="http://schemas.microsoft.com/office/drawing/2014/main" id="{D6D61122-C9F9-4640-ACA5-984A075DD85E}"/>
               </a:ext>
             </a:extLst>
           </p:cNvPr>
@@ -11199,7 +11399,7 @@
           <p:cNvPr id="6" name="">
             <a:extLst xmlns:a="http://schemas.openxmlformats.org/drawingml/2006/main">
               <a:ext uri="{FF2B5EF4-FFF2-40B4-BE49-F238E27FC236}">
-                <a16:creationId xmlns:a16="http://schemas.microsoft.com/office/drawing/2014/main" id="{10AFCE22-539B-4D3B-84DE-DC4FEC5739A1}"/>
+                <a16:creationId xmlns:a16="http://schemas.microsoft.com/office/drawing/2014/main" id="{CFB4AE72-6061-43F9-BA05-84A4F66CF86D}"/>
               </a:ext>
             </a:extLst>
           </p:cNvPr>
@@ -11256,7 +11456,7 @@
           <p:cNvPr id="7" name="">
             <a:extLst xmlns:a="http://schemas.openxmlformats.org/drawingml/2006/main">
               <a:ext uri="{FF2B5EF4-FFF2-40B4-BE49-F238E27FC236}">
-                <a16:creationId xmlns:a16="http://schemas.microsoft.com/office/drawing/2014/main" id="{6D82BEBA-72F1-4CF6-871A-3F7EA4459C31}"/>
+                <a16:creationId xmlns:a16="http://schemas.microsoft.com/office/drawing/2014/main" id="{EBEDEC9E-00A1-4DBD-AE7B-BAFEA0B37615}"/>
               </a:ext>
             </a:extLst>
           </p:cNvPr>
@@ -11288,7 +11488,7 @@
           <p:cNvPr id="8" name="">
             <a:extLst xmlns:a="http://schemas.openxmlformats.org/drawingml/2006/main">
               <a:ext uri="{FF2B5EF4-FFF2-40B4-BE49-F238E27FC236}">
-                <a16:creationId xmlns:a16="http://schemas.microsoft.com/office/drawing/2014/main" id="{7EF7AFBB-4D0A-40EC-A11F-D421FC18FD6F}"/>
+                <a16:creationId xmlns:a16="http://schemas.microsoft.com/office/drawing/2014/main" id="{20D7629B-A9D3-4191-A20F-FC3D90541B0B}"/>
               </a:ext>
             </a:extLst>
           </p:cNvPr>
@@ -11345,7 +11545,7 @@
           <p:cNvPr id="9" name="">
             <a:extLst xmlns:a="http://schemas.openxmlformats.org/drawingml/2006/main">
               <a:ext uri="{FF2B5EF4-FFF2-40B4-BE49-F238E27FC236}">
-                <a16:creationId xmlns:a16="http://schemas.microsoft.com/office/drawing/2014/main" id="{43ADBB8F-C6E1-4EEC-AB5F-3D31BB041358}"/>
+                <a16:creationId xmlns:a16="http://schemas.microsoft.com/office/drawing/2014/main" id="{BA0BE998-396C-41C4-B4AE-72E0B9FD3D78}"/>
               </a:ext>
             </a:extLst>
           </p:cNvPr>
@@ -11406,7 +11606,7 @@
           <p:nvPr/>
         </p:nvPicPr>
         <p:blipFill>
-          <a:blip xmlns:r="http://schemas.openxmlformats.org/officeDocument/2006/relationships" xmlns:a="http://schemas.openxmlformats.org/drawingml/2006/main" r:embed="R09a3b670aa194706"/>
+          <a:blip xmlns:r="http://schemas.openxmlformats.org/officeDocument/2006/relationships" xmlns:a="http://schemas.openxmlformats.org/drawingml/2006/main" r:embed="R2ee76ff9226449c9"/>
           <a:stretch xmlns:a="http://schemas.openxmlformats.org/drawingml/2006/main"/>
         </p:blipFill>
         <p:spPr>
@@ -11424,7 +11624,7 @@
           <p:cNvPr id="11" name="">
             <a:extLst xmlns:a="http://schemas.openxmlformats.org/drawingml/2006/main">
               <a:ext uri="{FF2B5EF4-FFF2-40B4-BE49-F238E27FC236}">
-                <a16:creationId xmlns:a16="http://schemas.microsoft.com/office/drawing/2014/main" id="{4110847E-76EF-42A2-AA30-1F844790C9A7}"/>
+                <a16:creationId xmlns:a16="http://schemas.microsoft.com/office/drawing/2014/main" id="{F799B3B3-727C-4192-AA5A-FCB703AB5A99}"/>
               </a:ext>
             </a:extLst>
           </p:cNvPr>
@@ -11481,7 +11681,7 @@
           <p:cNvPr id="12" name="">
             <a:extLst xmlns:a="http://schemas.openxmlformats.org/drawingml/2006/main">
               <a:ext uri="{FF2B5EF4-FFF2-40B4-BE49-F238E27FC236}">
-                <a16:creationId xmlns:a16="http://schemas.microsoft.com/office/drawing/2014/main" id="{5186D030-D680-494B-8F94-E8A761A92F08}"/>
+                <a16:creationId xmlns:a16="http://schemas.microsoft.com/office/drawing/2014/main" id="{A80D2BA7-D7E4-40B2-A828-546E21C45A31}"/>
               </a:ext>
             </a:extLst>
           </p:cNvPr>
@@ -11538,7 +11738,7 @@
           <p:cNvPr id="13" name="">
             <a:extLst xmlns:a="http://schemas.openxmlformats.org/drawingml/2006/main">
               <a:ext uri="{FF2B5EF4-FFF2-40B4-BE49-F238E27FC236}">
-                <a16:creationId xmlns:a16="http://schemas.microsoft.com/office/drawing/2014/main" id="{E30060DB-8FA4-43B6-AF12-04E0D3B36EA9}"/>
+                <a16:creationId xmlns:a16="http://schemas.microsoft.com/office/drawing/2014/main" id="{15771EB4-7EEF-4F1D-BAD6-991D765EE6B8}"/>
               </a:ext>
             </a:extLst>
           </p:cNvPr>
@@ -11570,7 +11770,7 @@
           <p:cNvPr id="14" name="">
             <a:extLst xmlns:a="http://schemas.openxmlformats.org/drawingml/2006/main">
               <a:ext uri="{FF2B5EF4-FFF2-40B4-BE49-F238E27FC236}">
-                <a16:creationId xmlns:a16="http://schemas.microsoft.com/office/drawing/2014/main" id="{7624A2AD-727D-4B97-88B4-3A2185638FE7}"/>
+                <a16:creationId xmlns:a16="http://schemas.microsoft.com/office/drawing/2014/main" id="{D3E6F972-8622-4086-80F3-635ABAEF8453}"/>
               </a:ext>
             </a:extLst>
           </p:cNvPr>
@@ -11627,7 +11827,7 @@
           <p:cNvPr id="15" name="">
             <a:extLst xmlns:a="http://schemas.openxmlformats.org/drawingml/2006/main">
               <a:ext uri="{FF2B5EF4-FFF2-40B4-BE49-F238E27FC236}">
-                <a16:creationId xmlns:a16="http://schemas.microsoft.com/office/drawing/2014/main" id="{0BE6E11A-BB7C-441C-B881-4DA587D259D5}"/>
+                <a16:creationId xmlns:a16="http://schemas.microsoft.com/office/drawing/2014/main" id="{78CACD52-2140-4550-963D-FD9366E6B09D}"/>
               </a:ext>
             </a:extLst>
           </p:cNvPr>
@@ -11682,7 +11882,7 @@
     </p:spTree>
     <p:extLst>
       <p:ext uri="{BB962C8B-B14F-4D97-AF65-F5344CB8AC3E}">
-        <p14:creationId xmlns:p14="http://schemas.microsoft.com/office/powerpoint/2010/main" val="137488064"/>
+        <p14:creationId xmlns:p14="http://schemas.microsoft.com/office/powerpoint/2010/main" val="221004920"/>
       </p:ext>
     </p:extLst>
   </p:cSld>
@@ -11837,7 +12037,7 @@
           <p:cNvPr id="23" name="">
             <a:extLst xmlns:a="http://schemas.openxmlformats.org/drawingml/2006/main">
               <a:ext uri="{FF2B5EF4-FFF2-40B4-BE49-F238E27FC236}">
-                <a16:creationId xmlns:a16="http://schemas.microsoft.com/office/drawing/2014/main" id="{678636E4-AB16-45A4-8962-A369F50C3DF6}"/>
+                <a16:creationId xmlns:a16="http://schemas.microsoft.com/office/drawing/2014/main" id="{9E76EB4B-08AA-4D4C-B466-0D93D9595498}"/>
               </a:ext>
             </a:extLst>
           </p:cNvPr>
@@ -11869,7 +12069,7 @@
           <p:cNvPr id="2" name="">
             <a:extLst xmlns:a="http://schemas.openxmlformats.org/drawingml/2006/main">
               <a:ext uri="{FF2B5EF4-FFF2-40B4-BE49-F238E27FC236}">
-                <a16:creationId xmlns:a16="http://schemas.microsoft.com/office/drawing/2014/main" id="{14B39691-C49F-4753-BDCA-348EE1E4C041}"/>
+                <a16:creationId xmlns:a16="http://schemas.microsoft.com/office/drawing/2014/main" id="{3E7068B6-621D-4592-B7CC-13288A7ED420}"/>
               </a:ext>
             </a:extLst>
           </p:cNvPr>
@@ -11926,7 +12126,7 @@
           <p:cNvPr id="3" name="">
             <a:extLst xmlns:a="http://schemas.openxmlformats.org/drawingml/2006/main">
               <a:ext uri="{FF2B5EF4-FFF2-40B4-BE49-F238E27FC236}">
-                <a16:creationId xmlns:a16="http://schemas.microsoft.com/office/drawing/2014/main" id="{DAD2657B-60F1-42D7-91DB-9C1920BE7A08}"/>
+                <a16:creationId xmlns:a16="http://schemas.microsoft.com/office/drawing/2014/main" id="{C580B91E-F344-4297-A924-A491EE49B804}"/>
               </a:ext>
             </a:extLst>
           </p:cNvPr>
@@ -11958,7 +12158,7 @@
           <p:cNvPr id="4" name="">
             <a:extLst xmlns:a="http://schemas.openxmlformats.org/drawingml/2006/main">
               <a:ext uri="{FF2B5EF4-FFF2-40B4-BE49-F238E27FC236}">
-                <a16:creationId xmlns:a16="http://schemas.microsoft.com/office/drawing/2014/main" id="{5E450CA5-59E2-40CD-AAA1-2C94EFE61343}"/>
+                <a16:creationId xmlns:a16="http://schemas.microsoft.com/office/drawing/2014/main" id="{3BDF7CFB-3252-4A56-B5C6-4946C5A2F341}"/>
               </a:ext>
             </a:extLst>
           </p:cNvPr>
@@ -12015,7 +12215,7 @@
           <p:cNvPr id="5" name="">
             <a:extLst xmlns:a="http://schemas.openxmlformats.org/drawingml/2006/main">
               <a:ext uri="{FF2B5EF4-FFF2-40B4-BE49-F238E27FC236}">
-                <a16:creationId xmlns:a16="http://schemas.microsoft.com/office/drawing/2014/main" id="{FF75A8FD-88E3-4BC9-931B-A66D4BA83B2B}"/>
+                <a16:creationId xmlns:a16="http://schemas.microsoft.com/office/drawing/2014/main" id="{1B0ADC85-BED5-45B9-9975-C204F70261E8}"/>
               </a:ext>
             </a:extLst>
           </p:cNvPr>
@@ -12072,7 +12272,7 @@
           <p:cNvPr id="6" name="">
             <a:extLst xmlns:a="http://schemas.openxmlformats.org/drawingml/2006/main">
               <a:ext uri="{FF2B5EF4-FFF2-40B4-BE49-F238E27FC236}">
-                <a16:creationId xmlns:a16="http://schemas.microsoft.com/office/drawing/2014/main" id="{F6B72164-E88B-45C0-AE1F-D7B67A45A59C}"/>
+                <a16:creationId xmlns:a16="http://schemas.microsoft.com/office/drawing/2014/main" id="{7D137B9C-62DD-4EA2-85A8-1E533231E387}"/>
               </a:ext>
             </a:extLst>
           </p:cNvPr>
@@ -12129,7 +12329,7 @@
           <p:cNvPr id="7" name="">
             <a:extLst xmlns:a="http://schemas.openxmlformats.org/drawingml/2006/main">
               <a:ext uri="{FF2B5EF4-FFF2-40B4-BE49-F238E27FC236}">
-                <a16:creationId xmlns:a16="http://schemas.microsoft.com/office/drawing/2014/main" id="{3399AE12-A8A8-465E-A458-EC0E489DB3C2}"/>
+                <a16:creationId xmlns:a16="http://schemas.microsoft.com/office/drawing/2014/main" id="{B365FD00-89FE-4CDF-96B9-6CA26811874B}"/>
               </a:ext>
             </a:extLst>
           </p:cNvPr>
@@ -12161,7 +12361,7 @@
           <p:cNvPr id="8" name="">
             <a:extLst xmlns:a="http://schemas.openxmlformats.org/drawingml/2006/main">
               <a:ext uri="{FF2B5EF4-FFF2-40B4-BE49-F238E27FC236}">
-                <a16:creationId xmlns:a16="http://schemas.microsoft.com/office/drawing/2014/main" id="{89DCFAF1-7867-4F86-99FD-E1493AE8A30E}"/>
+                <a16:creationId xmlns:a16="http://schemas.microsoft.com/office/drawing/2014/main" id="{F206BD81-65B1-4D8C-BC0F-89CABE5AFABF}"/>
               </a:ext>
             </a:extLst>
           </p:cNvPr>
@@ -12218,7 +12418,7 @@
           <p:cNvPr id="9" name="">
             <a:extLst xmlns:a="http://schemas.openxmlformats.org/drawingml/2006/main">
               <a:ext uri="{FF2B5EF4-FFF2-40B4-BE49-F238E27FC236}">
-                <a16:creationId xmlns:a16="http://schemas.microsoft.com/office/drawing/2014/main" id="{8B6B146A-9683-4678-9A8A-867FFD88BE06}"/>
+                <a16:creationId xmlns:a16="http://schemas.microsoft.com/office/drawing/2014/main" id="{74338242-C4A8-4166-833E-E9083CF6DACD}"/>
               </a:ext>
             </a:extLst>
           </p:cNvPr>
@@ -12275,7 +12475,7 @@
           <p:cNvPr id="10" name="">
             <a:extLst xmlns:a="http://schemas.openxmlformats.org/drawingml/2006/main">
               <a:ext uri="{FF2B5EF4-FFF2-40B4-BE49-F238E27FC236}">
-                <a16:creationId xmlns:a16="http://schemas.microsoft.com/office/drawing/2014/main" id="{C308F00B-44AD-4565-A4D9-45DF8466E1C7}"/>
+                <a16:creationId xmlns:a16="http://schemas.microsoft.com/office/drawing/2014/main" id="{3688239B-B7F3-4A4E-BAAB-5BEF77E8A40A}"/>
               </a:ext>
             </a:extLst>
           </p:cNvPr>
@@ -12309,7 +12509,7 @@
           <p:cNvPr id="11" name="">
             <a:extLst xmlns:a="http://schemas.openxmlformats.org/drawingml/2006/main">
               <a:ext uri="{FF2B5EF4-FFF2-40B4-BE49-F238E27FC236}">
-                <a16:creationId xmlns:a16="http://schemas.microsoft.com/office/drawing/2014/main" id="{D7776398-1559-4E22-BAE9-5CF33DFA6F6A}"/>
+                <a16:creationId xmlns:a16="http://schemas.microsoft.com/office/drawing/2014/main" id="{FE801C09-5CEF-4A71-B7BD-8FA052F692EE}"/>
               </a:ext>
             </a:extLst>
           </p:cNvPr>
@@ -12341,7 +12541,7 @@
           <p:cNvPr id="12" name="">
             <a:extLst xmlns:a="http://schemas.openxmlformats.org/drawingml/2006/main">
               <a:ext uri="{FF2B5EF4-FFF2-40B4-BE49-F238E27FC236}">
-                <a16:creationId xmlns:a16="http://schemas.microsoft.com/office/drawing/2014/main" id="{45673F50-807C-4BE0-9EDB-FB12871231AF}"/>
+                <a16:creationId xmlns:a16="http://schemas.microsoft.com/office/drawing/2014/main" id="{175FD288-2543-480F-9DAC-E8681B585CCC}"/>
               </a:ext>
             </a:extLst>
           </p:cNvPr>
@@ -12398,7 +12598,7 @@
           <p:cNvPr id="13" name="">
             <a:extLst xmlns:a="http://schemas.openxmlformats.org/drawingml/2006/main">
               <a:ext uri="{FF2B5EF4-FFF2-40B4-BE49-F238E27FC236}">
-                <a16:creationId xmlns:a16="http://schemas.microsoft.com/office/drawing/2014/main" id="{AB1EDF40-5763-49DE-A16A-9E80374BBFC6}"/>
+                <a16:creationId xmlns:a16="http://schemas.microsoft.com/office/drawing/2014/main" id="{369654B9-E05B-4B1E-B32E-29B9FC16D688}"/>
               </a:ext>
             </a:extLst>
           </p:cNvPr>
@@ -12455,7 +12655,7 @@
           <p:cNvPr id="14" name="">
             <a:extLst xmlns:a="http://schemas.openxmlformats.org/drawingml/2006/main">
               <a:ext uri="{FF2B5EF4-FFF2-40B4-BE49-F238E27FC236}">
-                <a16:creationId xmlns:a16="http://schemas.microsoft.com/office/drawing/2014/main" id="{FAD2B1B0-838C-43B1-88FE-99C3E9902123}"/>
+                <a16:creationId xmlns:a16="http://schemas.microsoft.com/office/drawing/2014/main" id="{2EEA3560-A8F6-48F6-AFA4-360DD4A319BF}"/>
               </a:ext>
             </a:extLst>
           </p:cNvPr>
@@ -12489,7 +12689,7 @@
           <p:cNvPr id="15" name="">
             <a:extLst xmlns:a="http://schemas.openxmlformats.org/drawingml/2006/main">
               <a:ext uri="{FF2B5EF4-FFF2-40B4-BE49-F238E27FC236}">
-                <a16:creationId xmlns:a16="http://schemas.microsoft.com/office/drawing/2014/main" id="{F6980C24-7DB5-435C-826C-4753DD0B5588}"/>
+                <a16:creationId xmlns:a16="http://schemas.microsoft.com/office/drawing/2014/main" id="{9320E036-CDEC-4901-9CEE-3BFD3906DA61}"/>
               </a:ext>
             </a:extLst>
           </p:cNvPr>
@@ -12521,7 +12721,7 @@
           <p:cNvPr id="16" name="">
             <a:extLst xmlns:a="http://schemas.openxmlformats.org/drawingml/2006/main">
               <a:ext uri="{FF2B5EF4-FFF2-40B4-BE49-F238E27FC236}">
-                <a16:creationId xmlns:a16="http://schemas.microsoft.com/office/drawing/2014/main" id="{6C5885B2-93F9-4F95-845C-5D1BDB936AD1}"/>
+                <a16:creationId xmlns:a16="http://schemas.microsoft.com/office/drawing/2014/main" id="{DC06DD31-D573-453A-898E-6CB8CB116CB5}"/>
               </a:ext>
             </a:extLst>
           </p:cNvPr>
@@ -12578,7 +12778,7 @@
           <p:cNvPr id="17" name="">
             <a:extLst xmlns:a="http://schemas.openxmlformats.org/drawingml/2006/main">
               <a:ext uri="{FF2B5EF4-FFF2-40B4-BE49-F238E27FC236}">
-                <a16:creationId xmlns:a16="http://schemas.microsoft.com/office/drawing/2014/main" id="{F54289A1-5FD3-4404-9665-65194557C616}"/>
+                <a16:creationId xmlns:a16="http://schemas.microsoft.com/office/drawing/2014/main" id="{F0E7ECB8-C948-4CF6-A3B1-7D4DA8F07049}"/>
               </a:ext>
             </a:extLst>
           </p:cNvPr>
@@ -12635,7 +12835,7 @@
           <p:cNvPr id="18" name="">
             <a:extLst xmlns:a="http://schemas.openxmlformats.org/drawingml/2006/main">
               <a:ext uri="{FF2B5EF4-FFF2-40B4-BE49-F238E27FC236}">
-                <a16:creationId xmlns:a16="http://schemas.microsoft.com/office/drawing/2014/main" id="{F1ABB892-5CC5-4F4B-A7F1-4D57341601D5}"/>
+                <a16:creationId xmlns:a16="http://schemas.microsoft.com/office/drawing/2014/main" id="{46A170D0-2553-4510-B84C-3C81515BE054}"/>
               </a:ext>
             </a:extLst>
           </p:cNvPr>
@@ -12669,7 +12869,7 @@
           <p:cNvPr id="19" name="">
             <a:extLst xmlns:a="http://schemas.openxmlformats.org/drawingml/2006/main">
               <a:ext uri="{FF2B5EF4-FFF2-40B4-BE49-F238E27FC236}">
-                <a16:creationId xmlns:a16="http://schemas.microsoft.com/office/drawing/2014/main" id="{75EC3A31-A399-470F-827E-AF604A8A2DB6}"/>
+                <a16:creationId xmlns:a16="http://schemas.microsoft.com/office/drawing/2014/main" id="{8A4C9E4C-9724-4433-A80F-BFBDA7B42330}"/>
               </a:ext>
             </a:extLst>
           </p:cNvPr>
@@ -12701,7 +12901,7 @@
           <p:cNvPr id="20" name="">
             <a:extLst xmlns:a="http://schemas.openxmlformats.org/drawingml/2006/main">
               <a:ext uri="{FF2B5EF4-FFF2-40B4-BE49-F238E27FC236}">
-                <a16:creationId xmlns:a16="http://schemas.microsoft.com/office/drawing/2014/main" id="{3CA939B7-F247-4626-8F14-0A81DAEAD7DD}"/>
+                <a16:creationId xmlns:a16="http://schemas.microsoft.com/office/drawing/2014/main" id="{D539BDA6-57E4-4C68-B0CC-3BB98AF5CA7C}"/>
               </a:ext>
             </a:extLst>
           </p:cNvPr>
@@ -12758,7 +12958,7 @@
           <p:cNvPr id="21" name="">
             <a:extLst xmlns:a="http://schemas.openxmlformats.org/drawingml/2006/main">
               <a:ext uri="{FF2B5EF4-FFF2-40B4-BE49-F238E27FC236}">
-                <a16:creationId xmlns:a16="http://schemas.microsoft.com/office/drawing/2014/main" id="{C73F2BDE-47BF-4101-A730-8812DC3F64E6}"/>
+                <a16:creationId xmlns:a16="http://schemas.microsoft.com/office/drawing/2014/main" id="{22911028-43CE-403B-BA97-88246101077A}"/>
               </a:ext>
             </a:extLst>
           </p:cNvPr>
@@ -12815,7 +13015,7 @@
           <p:cNvPr id="22" name="">
             <a:extLst xmlns:a="http://schemas.openxmlformats.org/drawingml/2006/main">
               <a:ext uri="{FF2B5EF4-FFF2-40B4-BE49-F238E27FC236}">
-                <a16:creationId xmlns:a16="http://schemas.microsoft.com/office/drawing/2014/main" id="{C7BB6D87-9C20-44D2-BF63-14B686C97EB4}"/>
+                <a16:creationId xmlns:a16="http://schemas.microsoft.com/office/drawing/2014/main" id="{3988D727-2231-434B-A3A0-A9200C825E99}"/>
               </a:ext>
             </a:extLst>
           </p:cNvPr>
@@ -12870,7 +13070,7 @@
     </p:spTree>
     <p:extLst>
       <p:ext uri="{BB962C8B-B14F-4D97-AF65-F5344CB8AC3E}">
-        <p14:creationId xmlns:p14="http://schemas.microsoft.com/office/powerpoint/2010/main" val="213044908"/>
+        <p14:creationId xmlns:p14="http://schemas.microsoft.com/office/powerpoint/2010/main" val="1770845394"/>
       </p:ext>
     </p:extLst>
   </p:cSld>
@@ -13071,7 +13271,7 @@
           <p:cNvPr id="22" name="">
             <a:extLst xmlns:a="http://schemas.openxmlformats.org/drawingml/2006/main">
               <a:ext uri="{FF2B5EF4-FFF2-40B4-BE49-F238E27FC236}">
-                <a16:creationId xmlns:a16="http://schemas.microsoft.com/office/drawing/2014/main" id="{02E01A4D-2EF4-4585-AE26-7BC8467C56C5}"/>
+                <a16:creationId xmlns:a16="http://schemas.microsoft.com/office/drawing/2014/main" id="{D7741B57-8905-4406-8B00-C1F7663AB03B}"/>
               </a:ext>
             </a:extLst>
           </p:cNvPr>
@@ -13103,7 +13303,7 @@
           <p:cNvPr id="2" name="">
             <a:extLst xmlns:a="http://schemas.openxmlformats.org/drawingml/2006/main">
               <a:ext uri="{FF2B5EF4-FFF2-40B4-BE49-F238E27FC236}">
-                <a16:creationId xmlns:a16="http://schemas.microsoft.com/office/drawing/2014/main" id="{8DA7E512-2ABF-4547-9BD3-53E25F54E331}"/>
+                <a16:creationId xmlns:a16="http://schemas.microsoft.com/office/drawing/2014/main" id="{025C6469-322F-4CAA-9B88-1F49B803468E}"/>
               </a:ext>
             </a:extLst>
           </p:cNvPr>
@@ -13160,7 +13360,7 @@
           <p:cNvPr id="3" name="">
             <a:extLst xmlns:a="http://schemas.openxmlformats.org/drawingml/2006/main">
               <a:ext uri="{FF2B5EF4-FFF2-40B4-BE49-F238E27FC236}">
-                <a16:creationId xmlns:a16="http://schemas.microsoft.com/office/drawing/2014/main" id="{70EB1196-CED4-4F76-A5BF-62B01F211891}"/>
+                <a16:creationId xmlns:a16="http://schemas.microsoft.com/office/drawing/2014/main" id="{8885DFFC-68B5-4BDD-BB5E-5660665B4D42}"/>
               </a:ext>
             </a:extLst>
           </p:cNvPr>
@@ -13192,7 +13392,7 @@
           <p:cNvPr id="4" name="">
             <a:extLst xmlns:a="http://schemas.openxmlformats.org/drawingml/2006/main">
               <a:ext uri="{FF2B5EF4-FFF2-40B4-BE49-F238E27FC236}">
-                <a16:creationId xmlns:a16="http://schemas.microsoft.com/office/drawing/2014/main" id="{5A4CE9CB-393E-49BA-A042-08E2FDD71EEB}"/>
+                <a16:creationId xmlns:a16="http://schemas.microsoft.com/office/drawing/2014/main" id="{83D62CC9-E766-4A18-BAD3-F2B34E5F29C0}"/>
               </a:ext>
             </a:extLst>
           </p:cNvPr>
@@ -13249,7 +13449,7 @@
           <p:cNvPr id="5" name="">
             <a:extLst xmlns:a="http://schemas.openxmlformats.org/drawingml/2006/main">
               <a:ext uri="{FF2B5EF4-FFF2-40B4-BE49-F238E27FC236}">
-                <a16:creationId xmlns:a16="http://schemas.microsoft.com/office/drawing/2014/main" id="{D732B51B-F11F-4DA9-B42C-3AE18E625C4B}"/>
+                <a16:creationId xmlns:a16="http://schemas.microsoft.com/office/drawing/2014/main" id="{D9253BEE-FBD1-4059-A177-5B192FCB46C8}"/>
               </a:ext>
             </a:extLst>
           </p:cNvPr>
@@ -13306,7 +13506,7 @@
           <p:cNvPr id="6" name="">
             <a:extLst xmlns:a="http://schemas.openxmlformats.org/drawingml/2006/main">
               <a:ext uri="{FF2B5EF4-FFF2-40B4-BE49-F238E27FC236}">
-                <a16:creationId xmlns:a16="http://schemas.microsoft.com/office/drawing/2014/main" id="{47343C88-121A-4685-8456-A73A27D78D82}"/>
+                <a16:creationId xmlns:a16="http://schemas.microsoft.com/office/drawing/2014/main" id="{C7AFFB8A-2E97-4AAF-A15F-E5462842001B}"/>
               </a:ext>
             </a:extLst>
           </p:cNvPr>
@@ -13363,7 +13563,7 @@
           <p:cNvPr id="7" name="">
             <a:extLst xmlns:a="http://schemas.openxmlformats.org/drawingml/2006/main">
               <a:ext uri="{FF2B5EF4-FFF2-40B4-BE49-F238E27FC236}">
-                <a16:creationId xmlns:a16="http://schemas.microsoft.com/office/drawing/2014/main" id="{F2A3F675-D850-4EB6-B4FF-88E40EFB530B}"/>
+                <a16:creationId xmlns:a16="http://schemas.microsoft.com/office/drawing/2014/main" id="{2B53E11A-5E52-4FBC-8D7D-0A70ECAA3929}"/>
               </a:ext>
             </a:extLst>
           </p:cNvPr>
@@ -13395,7 +13595,7 @@
           <p:cNvPr id="8" name="">
             <a:extLst xmlns:a="http://schemas.openxmlformats.org/drawingml/2006/main">
               <a:ext uri="{FF2B5EF4-FFF2-40B4-BE49-F238E27FC236}">
-                <a16:creationId xmlns:a16="http://schemas.microsoft.com/office/drawing/2014/main" id="{8CF3B984-E811-4A69-846F-7F4C47E904D5}"/>
+                <a16:creationId xmlns:a16="http://schemas.microsoft.com/office/drawing/2014/main" id="{82AF02FB-47BB-4B5D-91B3-CA44EC3B02EF}"/>
               </a:ext>
             </a:extLst>
           </p:cNvPr>
@@ -13452,7 +13652,7 @@
           <p:cNvPr id="9" name="">
             <a:extLst xmlns:a="http://schemas.openxmlformats.org/drawingml/2006/main">
               <a:ext uri="{FF2B5EF4-FFF2-40B4-BE49-F238E27FC236}">
-                <a16:creationId xmlns:a16="http://schemas.microsoft.com/office/drawing/2014/main" id="{6EB5D439-832C-4AA4-AB2B-ABEF6F41F8D0}"/>
+                <a16:creationId xmlns:a16="http://schemas.microsoft.com/office/drawing/2014/main" id="{28A7951D-0509-4046-8BF1-5E1C7B9CB725}"/>
               </a:ext>
             </a:extLst>
           </p:cNvPr>
@@ -13509,7 +13709,7 @@
           <p:cNvPr id="10" name="">
             <a:extLst xmlns:a="http://schemas.openxmlformats.org/drawingml/2006/main">
               <a:ext uri="{FF2B5EF4-FFF2-40B4-BE49-F238E27FC236}">
-                <a16:creationId xmlns:a16="http://schemas.microsoft.com/office/drawing/2014/main" id="{78ECE247-10D0-4A4D-8CF2-32FE8B01D392}"/>
+                <a16:creationId xmlns:a16="http://schemas.microsoft.com/office/drawing/2014/main" id="{F249F208-C8BF-4FD3-ABA4-F64045BFCC66}"/>
               </a:ext>
             </a:extLst>
           </p:cNvPr>
@@ -13543,7 +13743,7 @@
           <p:cNvPr id="11" name="">
             <a:extLst xmlns:a="http://schemas.openxmlformats.org/drawingml/2006/main">
               <a:ext uri="{FF2B5EF4-FFF2-40B4-BE49-F238E27FC236}">
-                <a16:creationId xmlns:a16="http://schemas.microsoft.com/office/drawing/2014/main" id="{60F9B5A1-D4DF-419A-A991-3166C61878C0}"/>
+                <a16:creationId xmlns:a16="http://schemas.microsoft.com/office/drawing/2014/main" id="{4DAA6427-09B5-4202-9342-61F94296CA9B}"/>
               </a:ext>
             </a:extLst>
           </p:cNvPr>
@@ -13575,7 +13775,7 @@
           <p:cNvPr id="12" name="">
             <a:extLst xmlns:a="http://schemas.openxmlformats.org/drawingml/2006/main">
               <a:ext uri="{FF2B5EF4-FFF2-40B4-BE49-F238E27FC236}">
-                <a16:creationId xmlns:a16="http://schemas.microsoft.com/office/drawing/2014/main" id="{91697A42-2FD3-4CB0-B44E-D82ABEA7C52D}"/>
+                <a16:creationId xmlns:a16="http://schemas.microsoft.com/office/drawing/2014/main" id="{5882C743-55D8-491F-AB2C-0740F0992158}"/>
               </a:ext>
             </a:extLst>
           </p:cNvPr>
@@ -13632,7 +13832,7 @@
           <p:cNvPr id="13" name="">
             <a:extLst xmlns:a="http://schemas.openxmlformats.org/drawingml/2006/main">
               <a:ext uri="{FF2B5EF4-FFF2-40B4-BE49-F238E27FC236}">
-                <a16:creationId xmlns:a16="http://schemas.microsoft.com/office/drawing/2014/main" id="{377DAD86-D484-4E7B-9D0E-226F765ADA76}"/>
+                <a16:creationId xmlns:a16="http://schemas.microsoft.com/office/drawing/2014/main" id="{770B46B7-F5A1-4AC2-804C-2A68C7345261}"/>
               </a:ext>
             </a:extLst>
           </p:cNvPr>
@@ -13689,7 +13889,7 @@
           <p:cNvPr id="14" name="">
             <a:extLst xmlns:a="http://schemas.openxmlformats.org/drawingml/2006/main">
               <a:ext uri="{FF2B5EF4-FFF2-40B4-BE49-F238E27FC236}">
-                <a16:creationId xmlns:a16="http://schemas.microsoft.com/office/drawing/2014/main" id="{F6CC7C04-9EC8-4B7A-8243-C7AE5296F438}"/>
+                <a16:creationId xmlns:a16="http://schemas.microsoft.com/office/drawing/2014/main" id="{3DE19DEE-FE6E-41A4-BE86-A78A34A4D928}"/>
               </a:ext>
             </a:extLst>
           </p:cNvPr>
@@ -13723,7 +13923,7 @@
           <p:cNvPr id="15" name="">
             <a:extLst xmlns:a="http://schemas.openxmlformats.org/drawingml/2006/main">
               <a:ext uri="{FF2B5EF4-FFF2-40B4-BE49-F238E27FC236}">
-                <a16:creationId xmlns:a16="http://schemas.microsoft.com/office/drawing/2014/main" id="{62936684-7107-4E32-AD01-CC606CB9C8F1}"/>
+                <a16:creationId xmlns:a16="http://schemas.microsoft.com/office/drawing/2014/main" id="{0F97642E-5468-4078-B289-CF4FF944D474}"/>
               </a:ext>
             </a:extLst>
           </p:cNvPr>
@@ -13755,7 +13955,7 @@
           <p:cNvPr id="16" name="">
             <a:extLst xmlns:a="http://schemas.openxmlformats.org/drawingml/2006/main">
               <a:ext uri="{FF2B5EF4-FFF2-40B4-BE49-F238E27FC236}">
-                <a16:creationId xmlns:a16="http://schemas.microsoft.com/office/drawing/2014/main" id="{977F8E82-7C07-42B2-9AEB-1EB265CCCCDE}"/>
+                <a16:creationId xmlns:a16="http://schemas.microsoft.com/office/drawing/2014/main" id="{9B1C705B-A11C-4583-B0D0-AE01A62EE931}"/>
               </a:ext>
             </a:extLst>
           </p:cNvPr>
@@ -13812,7 +14012,7 @@
           <p:cNvPr id="17" name="">
             <a:extLst xmlns:a="http://schemas.openxmlformats.org/drawingml/2006/main">
               <a:ext uri="{FF2B5EF4-FFF2-40B4-BE49-F238E27FC236}">
-                <a16:creationId xmlns:a16="http://schemas.microsoft.com/office/drawing/2014/main" id="{C910628C-D054-473D-AF0E-8E5235E0B997}"/>
+                <a16:creationId xmlns:a16="http://schemas.microsoft.com/office/drawing/2014/main" id="{6800DC9C-5690-4EF0-A464-2885B58F6A42}"/>
               </a:ext>
             </a:extLst>
           </p:cNvPr>
@@ -13869,7 +14069,7 @@
           <p:cNvPr id="18" name="">
             <a:extLst xmlns:a="http://schemas.openxmlformats.org/drawingml/2006/main">
               <a:ext uri="{FF2B5EF4-FFF2-40B4-BE49-F238E27FC236}">
-                <a16:creationId xmlns:a16="http://schemas.microsoft.com/office/drawing/2014/main" id="{D589A141-1656-4E44-BE76-C624CE7EE5F3}"/>
+                <a16:creationId xmlns:a16="http://schemas.microsoft.com/office/drawing/2014/main" id="{1483D66E-51E1-47D9-9782-983E68E66039}"/>
               </a:ext>
             </a:extLst>
           </p:cNvPr>
@@ -13903,7 +14103,7 @@
           <p:cNvPr id="19" name="">
             <a:extLst xmlns:a="http://schemas.openxmlformats.org/drawingml/2006/main">
               <a:ext uri="{FF2B5EF4-FFF2-40B4-BE49-F238E27FC236}">
-                <a16:creationId xmlns:a16="http://schemas.microsoft.com/office/drawing/2014/main" id="{EC44D84C-675C-439C-A185-4856CB3C301D}"/>
+                <a16:creationId xmlns:a16="http://schemas.microsoft.com/office/drawing/2014/main" id="{AE6327F1-39EB-4D81-9EFE-AE45A69C8DEE}"/>
               </a:ext>
             </a:extLst>
           </p:cNvPr>
@@ -13935,7 +14135,7 @@
           <p:cNvPr id="20" name="">
             <a:extLst xmlns:a="http://schemas.openxmlformats.org/drawingml/2006/main">
               <a:ext uri="{FF2B5EF4-FFF2-40B4-BE49-F238E27FC236}">
-                <a16:creationId xmlns:a16="http://schemas.microsoft.com/office/drawing/2014/main" id="{1F0BC34C-6702-4B26-A107-0F93BB8BB608}"/>
+                <a16:creationId xmlns:a16="http://schemas.microsoft.com/office/drawing/2014/main" id="{4AD7B7BF-7DA1-4A48-9F32-85984AC74103}"/>
               </a:ext>
             </a:extLst>
           </p:cNvPr>
@@ -13992,7 +14192,7 @@
           <p:cNvPr id="21" name="">
             <a:extLst xmlns:a="http://schemas.openxmlformats.org/drawingml/2006/main">
               <a:ext uri="{FF2B5EF4-FFF2-40B4-BE49-F238E27FC236}">
-                <a16:creationId xmlns:a16="http://schemas.microsoft.com/office/drawing/2014/main" id="{2F8256E6-46C7-4E33-9675-D41A84A15E06}"/>
+                <a16:creationId xmlns:a16="http://schemas.microsoft.com/office/drawing/2014/main" id="{8D11489D-CFB4-4AC3-A26D-230572031CD6}"/>
               </a:ext>
             </a:extLst>
           </p:cNvPr>
@@ -14047,7 +14247,7 @@
     </p:spTree>
     <p:extLst>
       <p:ext uri="{BB962C8B-B14F-4D97-AF65-F5344CB8AC3E}">
-        <p14:creationId xmlns:p14="http://schemas.microsoft.com/office/powerpoint/2010/main" val="1820009937"/>
+        <p14:creationId xmlns:p14="http://schemas.microsoft.com/office/powerpoint/2010/main" val="1380544109"/>
       </p:ext>
     </p:extLst>
   </p:cSld>
